--- a/Шумов Д защита УП.pptx
+++ b/Шумов Д защита УП.pptx
@@ -1,27 +1,27 @@
 
 <file path=ppt/presentation.xml><?xml version="1.0" encoding="utf-8"?>
-<p:presentation xmlns:a="http://schemas.openxmlformats.org/drawingml/2006/main" xmlns:r="http://schemas.openxmlformats.org/officeDocument/2006/relationships" xmlns:p="http://schemas.openxmlformats.org/presentationml/2006/main" saveSubsetFonts="1">
+<p:presentation xmlns:a="http://schemas.openxmlformats.org/drawingml/2006/main" xmlns:r="http://schemas.openxmlformats.org/officeDocument/2006/relationships" xmlns:p="http://schemas.openxmlformats.org/presentationml/2006/main">
   <p:sldMasterIdLst>
     <p:sldMasterId id="2147483648" r:id="rId1"/>
   </p:sldMasterIdLst>
   <p:sldIdLst>
-    <p:sldId id="256" r:id="rId2"/>
-    <p:sldId id="257" r:id="rId3"/>
-    <p:sldId id="258" r:id="rId4"/>
-    <p:sldId id="259" r:id="rId5"/>
-    <p:sldId id="260" r:id="rId6"/>
-    <p:sldId id="261" r:id="rId7"/>
-    <p:sldId id="262" r:id="rId8"/>
-    <p:sldId id="263" r:id="rId9"/>
-    <p:sldId id="267" r:id="rId10"/>
-    <p:sldId id="264" r:id="rId11"/>
-    <p:sldId id="265" r:id="rId12"/>
-    <p:sldId id="266" r:id="rId13"/>
-    <p:sldId id="268" r:id="rId14"/>
-    <p:sldId id="269" r:id="rId15"/>
-    <p:sldId id="270" r:id="rId16"/>
-    <p:sldId id="271" r:id="rId17"/>
-    <p:sldId id="272" r:id="rId18"/>
+    <p:sldId id="256" r:id="rId3"/>
+    <p:sldId id="257" r:id="rId4"/>
+    <p:sldId id="258" r:id="rId5"/>
+    <p:sldId id="259" r:id="rId6"/>
+    <p:sldId id="260" r:id="rId7"/>
+    <p:sldId id="261" r:id="rId8"/>
+    <p:sldId id="262" r:id="rId9"/>
+    <p:sldId id="263" r:id="rId10"/>
+    <p:sldId id="267" r:id="rId11"/>
+    <p:sldId id="264" r:id="rId12"/>
+    <p:sldId id="265" r:id="rId13"/>
+    <p:sldId id="266" r:id="rId14"/>
+    <p:sldId id="268" r:id="rId15"/>
+    <p:sldId id="269" r:id="rId16"/>
+    <p:sldId id="270" r:id="rId17"/>
+    <p:sldId id="271" r:id="rId18"/>
+    <p:sldId id="272" r:id="rId19"/>
   </p:sldIdLst>
   <p:sldSz cx="12192000" cy="6858000"/>
   <p:notesSz cx="6858000" cy="9144000"/>
@@ -120,11 +120,6 @@
       </a:defRPr>
     </a:lvl9pPr>
   </p:defaultTextStyle>
-  <p:extLst>
-    <p:ext uri="{EFAFB233-063F-42B5-8137-9DF3F51BA10A}">
-      <p15:sldGuideLst xmlns:p15="http://schemas.microsoft.com/office/powerpoint/2012/main"/>
-    </p:ext>
-  </p:extLst>
 </p:presentation>
 </file>
 
@@ -259,7 +254,6 @@
           <a:p>
             <a:fld id="{03C34D3A-21F5-4581-941C-C84EE2C2DBCA}" type="datetimeFigureOut">
               <a:rPr lang="ru-RU" smtClean="0"/>
-              <a:t>21.04.2026</a:t>
             </a:fld>
             <a:endParaRPr lang="ru-RU"/>
           </a:p>
@@ -301,18 +295,12 @@
           <a:p>
             <a:fld id="{0B5801A7-98A4-4FBC-932A-8D2DACE238E9}" type="slidenum">
               <a:rPr lang="ru-RU" smtClean="0"/>
-              <a:t>‹#›</a:t>
             </a:fld>
             <a:endParaRPr lang="ru-RU"/>
           </a:p>
         </p:txBody>
       </p:sp>
     </p:spTree>
-    <p:extLst>
-      <p:ext uri="{BB962C8B-B14F-4D97-AF65-F5344CB8AC3E}">
-        <p14:creationId xmlns:p14="http://schemas.microsoft.com/office/powerpoint/2010/main" val="3556789366"/>
-      </p:ext>
-    </p:extLst>
   </p:cSld>
   <p:clrMapOvr>
     <a:masterClrMapping/>
@@ -380,6 +368,7 @@
               <a:rPr lang="ru-RU" smtClean="0"/>
               <a:t>Образец текста</a:t>
             </a:r>
+            <a:endParaRPr lang="ru-RU" smtClean="0"/>
           </a:p>
           <a:p>
             <a:pPr lvl="1"/>
@@ -387,6 +376,7 @@
               <a:rPr lang="ru-RU" smtClean="0"/>
               <a:t>Второй уровень</a:t>
             </a:r>
+            <a:endParaRPr lang="ru-RU" smtClean="0"/>
           </a:p>
           <a:p>
             <a:pPr lvl="2"/>
@@ -394,6 +384,7 @@
               <a:rPr lang="ru-RU" smtClean="0"/>
               <a:t>Третий уровень</a:t>
             </a:r>
+            <a:endParaRPr lang="ru-RU" smtClean="0"/>
           </a:p>
           <a:p>
             <a:pPr lvl="3"/>
@@ -401,6 +392,7 @@
               <a:rPr lang="ru-RU" smtClean="0"/>
               <a:t>Четвертый уровень</a:t>
             </a:r>
+            <a:endParaRPr lang="ru-RU" smtClean="0"/>
           </a:p>
           <a:p>
             <a:pPr lvl="4"/>
@@ -429,7 +421,6 @@
           <a:p>
             <a:fld id="{03C34D3A-21F5-4581-941C-C84EE2C2DBCA}" type="datetimeFigureOut">
               <a:rPr lang="ru-RU" smtClean="0"/>
-              <a:t>21.04.2026</a:t>
             </a:fld>
             <a:endParaRPr lang="ru-RU"/>
           </a:p>
@@ -471,18 +462,12 @@
           <a:p>
             <a:fld id="{0B5801A7-98A4-4FBC-932A-8D2DACE238E9}" type="slidenum">
               <a:rPr lang="ru-RU" smtClean="0"/>
-              <a:t>‹#›</a:t>
             </a:fld>
             <a:endParaRPr lang="ru-RU"/>
           </a:p>
         </p:txBody>
       </p:sp>
     </p:spTree>
-    <p:extLst>
-      <p:ext uri="{BB962C8B-B14F-4D97-AF65-F5344CB8AC3E}">
-        <p14:creationId xmlns:p14="http://schemas.microsoft.com/office/powerpoint/2010/main" val="32550605"/>
-      </p:ext>
-    </p:extLst>
   </p:cSld>
   <p:clrMapOvr>
     <a:masterClrMapping/>
@@ -560,6 +545,7 @@
               <a:rPr lang="ru-RU" smtClean="0"/>
               <a:t>Образец текста</a:t>
             </a:r>
+            <a:endParaRPr lang="ru-RU" smtClean="0"/>
           </a:p>
           <a:p>
             <a:pPr lvl="1"/>
@@ -567,6 +553,7 @@
               <a:rPr lang="ru-RU" smtClean="0"/>
               <a:t>Второй уровень</a:t>
             </a:r>
+            <a:endParaRPr lang="ru-RU" smtClean="0"/>
           </a:p>
           <a:p>
             <a:pPr lvl="2"/>
@@ -574,6 +561,7 @@
               <a:rPr lang="ru-RU" smtClean="0"/>
               <a:t>Третий уровень</a:t>
             </a:r>
+            <a:endParaRPr lang="ru-RU" smtClean="0"/>
           </a:p>
           <a:p>
             <a:pPr lvl="3"/>
@@ -581,6 +569,7 @@
               <a:rPr lang="ru-RU" smtClean="0"/>
               <a:t>Четвертый уровень</a:t>
             </a:r>
+            <a:endParaRPr lang="ru-RU" smtClean="0"/>
           </a:p>
           <a:p>
             <a:pPr lvl="4"/>
@@ -609,7 +598,6 @@
           <a:p>
             <a:fld id="{03C34D3A-21F5-4581-941C-C84EE2C2DBCA}" type="datetimeFigureOut">
               <a:rPr lang="ru-RU" smtClean="0"/>
-              <a:t>21.04.2026</a:t>
             </a:fld>
             <a:endParaRPr lang="ru-RU"/>
           </a:p>
@@ -651,18 +639,12 @@
           <a:p>
             <a:fld id="{0B5801A7-98A4-4FBC-932A-8D2DACE238E9}" type="slidenum">
               <a:rPr lang="ru-RU" smtClean="0"/>
-              <a:t>‹#›</a:t>
             </a:fld>
             <a:endParaRPr lang="ru-RU"/>
           </a:p>
         </p:txBody>
       </p:sp>
     </p:spTree>
-    <p:extLst>
-      <p:ext uri="{BB962C8B-B14F-4D97-AF65-F5344CB8AC3E}">
-        <p14:creationId xmlns:p14="http://schemas.microsoft.com/office/powerpoint/2010/main" val="2137137327"/>
-      </p:ext>
-    </p:extLst>
   </p:cSld>
   <p:clrMapOvr>
     <a:masterClrMapping/>
@@ -730,6 +712,7 @@
               <a:rPr lang="ru-RU" smtClean="0"/>
               <a:t>Образец текста</a:t>
             </a:r>
+            <a:endParaRPr lang="ru-RU" smtClean="0"/>
           </a:p>
           <a:p>
             <a:pPr lvl="1"/>
@@ -737,6 +720,7 @@
               <a:rPr lang="ru-RU" smtClean="0"/>
               <a:t>Второй уровень</a:t>
             </a:r>
+            <a:endParaRPr lang="ru-RU" smtClean="0"/>
           </a:p>
           <a:p>
             <a:pPr lvl="2"/>
@@ -744,6 +728,7 @@
               <a:rPr lang="ru-RU" smtClean="0"/>
               <a:t>Третий уровень</a:t>
             </a:r>
+            <a:endParaRPr lang="ru-RU" smtClean="0"/>
           </a:p>
           <a:p>
             <a:pPr lvl="3"/>
@@ -751,6 +736,7 @@
               <a:rPr lang="ru-RU" smtClean="0"/>
               <a:t>Четвертый уровень</a:t>
             </a:r>
+            <a:endParaRPr lang="ru-RU" smtClean="0"/>
           </a:p>
           <a:p>
             <a:pPr lvl="4"/>
@@ -779,7 +765,6 @@
           <a:p>
             <a:fld id="{03C34D3A-21F5-4581-941C-C84EE2C2DBCA}" type="datetimeFigureOut">
               <a:rPr lang="ru-RU" smtClean="0"/>
-              <a:t>21.04.2026</a:t>
             </a:fld>
             <a:endParaRPr lang="ru-RU"/>
           </a:p>
@@ -821,18 +806,12 @@
           <a:p>
             <a:fld id="{0B5801A7-98A4-4FBC-932A-8D2DACE238E9}" type="slidenum">
               <a:rPr lang="ru-RU" smtClean="0"/>
-              <a:t>‹#›</a:t>
             </a:fld>
             <a:endParaRPr lang="ru-RU"/>
           </a:p>
         </p:txBody>
       </p:sp>
     </p:spTree>
-    <p:extLst>
-      <p:ext uri="{BB962C8B-B14F-4D97-AF65-F5344CB8AC3E}">
-        <p14:creationId xmlns:p14="http://schemas.microsoft.com/office/powerpoint/2010/main" val="3518869128"/>
-      </p:ext>
-    </p:extLst>
   </p:cSld>
   <p:clrMapOvr>
     <a:masterClrMapping/>
@@ -1005,6 +984,7 @@
               <a:rPr lang="ru-RU" smtClean="0"/>
               <a:t>Образец текста</a:t>
             </a:r>
+            <a:endParaRPr lang="ru-RU" smtClean="0"/>
           </a:p>
         </p:txBody>
       </p:sp>
@@ -1025,7 +1005,6 @@
           <a:p>
             <a:fld id="{03C34D3A-21F5-4581-941C-C84EE2C2DBCA}" type="datetimeFigureOut">
               <a:rPr lang="ru-RU" smtClean="0"/>
-              <a:t>21.04.2026</a:t>
             </a:fld>
             <a:endParaRPr lang="ru-RU"/>
           </a:p>
@@ -1067,18 +1046,12 @@
           <a:p>
             <a:fld id="{0B5801A7-98A4-4FBC-932A-8D2DACE238E9}" type="slidenum">
               <a:rPr lang="ru-RU" smtClean="0"/>
-              <a:t>‹#›</a:t>
             </a:fld>
             <a:endParaRPr lang="ru-RU"/>
           </a:p>
         </p:txBody>
       </p:sp>
     </p:spTree>
-    <p:extLst>
-      <p:ext uri="{BB962C8B-B14F-4D97-AF65-F5344CB8AC3E}">
-        <p14:creationId xmlns:p14="http://schemas.microsoft.com/office/powerpoint/2010/main" val="1612261970"/>
-      </p:ext>
-    </p:extLst>
   </p:cSld>
   <p:clrMapOvr>
     <a:masterClrMapping/>
@@ -1151,6 +1124,7 @@
               <a:rPr lang="ru-RU" smtClean="0"/>
               <a:t>Образец текста</a:t>
             </a:r>
+            <a:endParaRPr lang="ru-RU" smtClean="0"/>
           </a:p>
           <a:p>
             <a:pPr lvl="1"/>
@@ -1158,6 +1132,7 @@
               <a:rPr lang="ru-RU" smtClean="0"/>
               <a:t>Второй уровень</a:t>
             </a:r>
+            <a:endParaRPr lang="ru-RU" smtClean="0"/>
           </a:p>
           <a:p>
             <a:pPr lvl="2"/>
@@ -1165,6 +1140,7 @@
               <a:rPr lang="ru-RU" smtClean="0"/>
               <a:t>Третий уровень</a:t>
             </a:r>
+            <a:endParaRPr lang="ru-RU" smtClean="0"/>
           </a:p>
           <a:p>
             <a:pPr lvl="3"/>
@@ -1172,6 +1148,7 @@
               <a:rPr lang="ru-RU" smtClean="0"/>
               <a:t>Четвертый уровень</a:t>
             </a:r>
+            <a:endParaRPr lang="ru-RU" smtClean="0"/>
           </a:p>
           <a:p>
             <a:pPr lvl="4"/>
@@ -1208,6 +1185,7 @@
               <a:rPr lang="ru-RU" smtClean="0"/>
               <a:t>Образец текста</a:t>
             </a:r>
+            <a:endParaRPr lang="ru-RU" smtClean="0"/>
           </a:p>
           <a:p>
             <a:pPr lvl="1"/>
@@ -1215,6 +1193,7 @@
               <a:rPr lang="ru-RU" smtClean="0"/>
               <a:t>Второй уровень</a:t>
             </a:r>
+            <a:endParaRPr lang="ru-RU" smtClean="0"/>
           </a:p>
           <a:p>
             <a:pPr lvl="2"/>
@@ -1222,6 +1201,7 @@
               <a:rPr lang="ru-RU" smtClean="0"/>
               <a:t>Третий уровень</a:t>
             </a:r>
+            <a:endParaRPr lang="ru-RU" smtClean="0"/>
           </a:p>
           <a:p>
             <a:pPr lvl="3"/>
@@ -1229,6 +1209,7 @@
               <a:rPr lang="ru-RU" smtClean="0"/>
               <a:t>Четвертый уровень</a:t>
             </a:r>
+            <a:endParaRPr lang="ru-RU" smtClean="0"/>
           </a:p>
           <a:p>
             <a:pPr lvl="4"/>
@@ -1257,7 +1238,6 @@
           <a:p>
             <a:fld id="{03C34D3A-21F5-4581-941C-C84EE2C2DBCA}" type="datetimeFigureOut">
               <a:rPr lang="ru-RU" smtClean="0"/>
-              <a:t>21.04.2026</a:t>
             </a:fld>
             <a:endParaRPr lang="ru-RU"/>
           </a:p>
@@ -1299,18 +1279,12 @@
           <a:p>
             <a:fld id="{0B5801A7-98A4-4FBC-932A-8D2DACE238E9}" type="slidenum">
               <a:rPr lang="ru-RU" smtClean="0"/>
-              <a:t>‹#›</a:t>
             </a:fld>
             <a:endParaRPr lang="ru-RU"/>
           </a:p>
         </p:txBody>
       </p:sp>
     </p:spTree>
-    <p:extLst>
-      <p:ext uri="{BB962C8B-B14F-4D97-AF65-F5344CB8AC3E}">
-        <p14:creationId xmlns:p14="http://schemas.microsoft.com/office/powerpoint/2010/main" val="1409755380"/>
-      </p:ext>
-    </p:extLst>
   </p:cSld>
   <p:clrMapOvr>
     <a:masterClrMapping/>
@@ -1425,6 +1399,7 @@
               <a:rPr lang="ru-RU" smtClean="0"/>
               <a:t>Образец текста</a:t>
             </a:r>
+            <a:endParaRPr lang="ru-RU" smtClean="0"/>
           </a:p>
         </p:txBody>
       </p:sp>
@@ -1453,6 +1428,7 @@
               <a:rPr lang="ru-RU" smtClean="0"/>
               <a:t>Образец текста</a:t>
             </a:r>
+            <a:endParaRPr lang="ru-RU" smtClean="0"/>
           </a:p>
           <a:p>
             <a:pPr lvl="1"/>
@@ -1460,6 +1436,7 @@
               <a:rPr lang="ru-RU" smtClean="0"/>
               <a:t>Второй уровень</a:t>
             </a:r>
+            <a:endParaRPr lang="ru-RU" smtClean="0"/>
           </a:p>
           <a:p>
             <a:pPr lvl="2"/>
@@ -1467,6 +1444,7 @@
               <a:rPr lang="ru-RU" smtClean="0"/>
               <a:t>Третий уровень</a:t>
             </a:r>
+            <a:endParaRPr lang="ru-RU" smtClean="0"/>
           </a:p>
           <a:p>
             <a:pPr lvl="3"/>
@@ -1474,6 +1452,7 @@
               <a:rPr lang="ru-RU" smtClean="0"/>
               <a:t>Четвертый уровень</a:t>
             </a:r>
+            <a:endParaRPr lang="ru-RU" smtClean="0"/>
           </a:p>
           <a:p>
             <a:pPr lvl="4"/>
@@ -1547,6 +1526,7 @@
               <a:rPr lang="ru-RU" smtClean="0"/>
               <a:t>Образец текста</a:t>
             </a:r>
+            <a:endParaRPr lang="ru-RU" smtClean="0"/>
           </a:p>
         </p:txBody>
       </p:sp>
@@ -1575,6 +1555,7 @@
               <a:rPr lang="ru-RU" smtClean="0"/>
               <a:t>Образец текста</a:t>
             </a:r>
+            <a:endParaRPr lang="ru-RU" smtClean="0"/>
           </a:p>
           <a:p>
             <a:pPr lvl="1"/>
@@ -1582,6 +1563,7 @@
               <a:rPr lang="ru-RU" smtClean="0"/>
               <a:t>Второй уровень</a:t>
             </a:r>
+            <a:endParaRPr lang="ru-RU" smtClean="0"/>
           </a:p>
           <a:p>
             <a:pPr lvl="2"/>
@@ -1589,6 +1571,7 @@
               <a:rPr lang="ru-RU" smtClean="0"/>
               <a:t>Третий уровень</a:t>
             </a:r>
+            <a:endParaRPr lang="ru-RU" smtClean="0"/>
           </a:p>
           <a:p>
             <a:pPr lvl="3"/>
@@ -1596,6 +1579,7 @@
               <a:rPr lang="ru-RU" smtClean="0"/>
               <a:t>Четвертый уровень</a:t>
             </a:r>
+            <a:endParaRPr lang="ru-RU" smtClean="0"/>
           </a:p>
           <a:p>
             <a:pPr lvl="4"/>
@@ -1624,7 +1608,6 @@
           <a:p>
             <a:fld id="{03C34D3A-21F5-4581-941C-C84EE2C2DBCA}" type="datetimeFigureOut">
               <a:rPr lang="ru-RU" smtClean="0"/>
-              <a:t>21.04.2026</a:t>
             </a:fld>
             <a:endParaRPr lang="ru-RU"/>
           </a:p>
@@ -1666,18 +1649,12 @@
           <a:p>
             <a:fld id="{0B5801A7-98A4-4FBC-932A-8D2DACE238E9}" type="slidenum">
               <a:rPr lang="ru-RU" smtClean="0"/>
-              <a:t>‹#›</a:t>
             </a:fld>
             <a:endParaRPr lang="ru-RU"/>
           </a:p>
         </p:txBody>
       </p:sp>
     </p:spTree>
-    <p:extLst>
-      <p:ext uri="{BB962C8B-B14F-4D97-AF65-F5344CB8AC3E}">
-        <p14:creationId xmlns:p14="http://schemas.microsoft.com/office/powerpoint/2010/main" val="1898205059"/>
-      </p:ext>
-    </p:extLst>
   </p:cSld>
   <p:clrMapOvr>
     <a:masterClrMapping/>
@@ -1742,7 +1719,6 @@
           <a:p>
             <a:fld id="{03C34D3A-21F5-4581-941C-C84EE2C2DBCA}" type="datetimeFigureOut">
               <a:rPr lang="ru-RU" smtClean="0"/>
-              <a:t>21.04.2026</a:t>
             </a:fld>
             <a:endParaRPr lang="ru-RU"/>
           </a:p>
@@ -1784,18 +1760,12 @@
           <a:p>
             <a:fld id="{0B5801A7-98A4-4FBC-932A-8D2DACE238E9}" type="slidenum">
               <a:rPr lang="ru-RU" smtClean="0"/>
-              <a:t>‹#›</a:t>
             </a:fld>
             <a:endParaRPr lang="ru-RU"/>
           </a:p>
         </p:txBody>
       </p:sp>
     </p:spTree>
-    <p:extLst>
-      <p:ext uri="{BB962C8B-B14F-4D97-AF65-F5344CB8AC3E}">
-        <p14:creationId xmlns:p14="http://schemas.microsoft.com/office/powerpoint/2010/main" val="3809644279"/>
-      </p:ext>
-    </p:extLst>
   </p:cSld>
   <p:clrMapOvr>
     <a:masterClrMapping/>
@@ -1837,7 +1807,6 @@
           <a:p>
             <a:fld id="{03C34D3A-21F5-4581-941C-C84EE2C2DBCA}" type="datetimeFigureOut">
               <a:rPr lang="ru-RU" smtClean="0"/>
-              <a:t>21.04.2026</a:t>
             </a:fld>
             <a:endParaRPr lang="ru-RU"/>
           </a:p>
@@ -1879,18 +1848,12 @@
           <a:p>
             <a:fld id="{0B5801A7-98A4-4FBC-932A-8D2DACE238E9}" type="slidenum">
               <a:rPr lang="ru-RU" smtClean="0"/>
-              <a:t>‹#›</a:t>
             </a:fld>
             <a:endParaRPr lang="ru-RU"/>
           </a:p>
         </p:txBody>
       </p:sp>
     </p:spTree>
-    <p:extLst>
-      <p:ext uri="{BB962C8B-B14F-4D97-AF65-F5344CB8AC3E}">
-        <p14:creationId xmlns:p14="http://schemas.microsoft.com/office/powerpoint/2010/main" val="3319772380"/>
-      </p:ext>
-    </p:extLst>
   </p:cSld>
   <p:clrMapOvr>
     <a:masterClrMapping/>
@@ -2000,6 +1963,7 @@
               <a:rPr lang="ru-RU" smtClean="0"/>
               <a:t>Образец текста</a:t>
             </a:r>
+            <a:endParaRPr lang="ru-RU" smtClean="0"/>
           </a:p>
           <a:p>
             <a:pPr lvl="1"/>
@@ -2007,6 +1971,7 @@
               <a:rPr lang="ru-RU" smtClean="0"/>
               <a:t>Второй уровень</a:t>
             </a:r>
+            <a:endParaRPr lang="ru-RU" smtClean="0"/>
           </a:p>
           <a:p>
             <a:pPr lvl="2"/>
@@ -2014,6 +1979,7 @@
               <a:rPr lang="ru-RU" smtClean="0"/>
               <a:t>Третий уровень</a:t>
             </a:r>
+            <a:endParaRPr lang="ru-RU" smtClean="0"/>
           </a:p>
           <a:p>
             <a:pPr lvl="3"/>
@@ -2021,6 +1987,7 @@
               <a:rPr lang="ru-RU" smtClean="0"/>
               <a:t>Четвертый уровень</a:t>
             </a:r>
+            <a:endParaRPr lang="ru-RU" smtClean="0"/>
           </a:p>
           <a:p>
             <a:pPr lvl="4"/>
@@ -2094,6 +2061,7 @@
               <a:rPr lang="ru-RU" smtClean="0"/>
               <a:t>Образец текста</a:t>
             </a:r>
+            <a:endParaRPr lang="ru-RU" smtClean="0"/>
           </a:p>
         </p:txBody>
       </p:sp>
@@ -2114,7 +2082,6 @@
           <a:p>
             <a:fld id="{03C34D3A-21F5-4581-941C-C84EE2C2DBCA}" type="datetimeFigureOut">
               <a:rPr lang="ru-RU" smtClean="0"/>
-              <a:t>21.04.2026</a:t>
             </a:fld>
             <a:endParaRPr lang="ru-RU"/>
           </a:p>
@@ -2156,18 +2123,12 @@
           <a:p>
             <a:fld id="{0B5801A7-98A4-4FBC-932A-8D2DACE238E9}" type="slidenum">
               <a:rPr lang="ru-RU" smtClean="0"/>
-              <a:t>‹#›</a:t>
             </a:fld>
             <a:endParaRPr lang="ru-RU"/>
           </a:p>
         </p:txBody>
       </p:sp>
     </p:spTree>
-    <p:extLst>
-      <p:ext uri="{BB962C8B-B14F-4D97-AF65-F5344CB8AC3E}">
-        <p14:creationId xmlns:p14="http://schemas.microsoft.com/office/powerpoint/2010/main" val="2865345686"/>
-      </p:ext>
-    </p:extLst>
   </p:cSld>
   <p:clrMapOvr>
     <a:masterClrMapping/>
@@ -2347,6 +2308,7 @@
               <a:rPr lang="ru-RU" smtClean="0"/>
               <a:t>Образец текста</a:t>
             </a:r>
+            <a:endParaRPr lang="ru-RU" smtClean="0"/>
           </a:p>
         </p:txBody>
       </p:sp>
@@ -2367,7 +2329,6 @@
           <a:p>
             <a:fld id="{03C34D3A-21F5-4581-941C-C84EE2C2DBCA}" type="datetimeFigureOut">
               <a:rPr lang="ru-RU" smtClean="0"/>
-              <a:t>21.04.2026</a:t>
             </a:fld>
             <a:endParaRPr lang="ru-RU"/>
           </a:p>
@@ -2409,18 +2370,12 @@
           <a:p>
             <a:fld id="{0B5801A7-98A4-4FBC-932A-8D2DACE238E9}" type="slidenum">
               <a:rPr lang="ru-RU" smtClean="0"/>
-              <a:t>‹#›</a:t>
             </a:fld>
             <a:endParaRPr lang="ru-RU"/>
           </a:p>
         </p:txBody>
       </p:sp>
     </p:spTree>
-    <p:extLst>
-      <p:ext uri="{BB962C8B-B14F-4D97-AF65-F5344CB8AC3E}">
-        <p14:creationId xmlns:p14="http://schemas.microsoft.com/office/powerpoint/2010/main" val="4021779388"/>
-      </p:ext>
-    </p:extLst>
   </p:cSld>
   <p:clrMapOvr>
     <a:masterClrMapping/>
@@ -2513,6 +2468,7 @@
               <a:rPr lang="ru-RU" smtClean="0"/>
               <a:t>Образец текста</a:t>
             </a:r>
+            <a:endParaRPr lang="ru-RU" smtClean="0"/>
           </a:p>
           <a:p>
             <a:pPr lvl="1"/>
@@ -2520,6 +2476,7 @@
               <a:rPr lang="ru-RU" smtClean="0"/>
               <a:t>Второй уровень</a:t>
             </a:r>
+            <a:endParaRPr lang="ru-RU" smtClean="0"/>
           </a:p>
           <a:p>
             <a:pPr lvl="2"/>
@@ -2527,6 +2484,7 @@
               <a:rPr lang="ru-RU" smtClean="0"/>
               <a:t>Третий уровень</a:t>
             </a:r>
+            <a:endParaRPr lang="ru-RU" smtClean="0"/>
           </a:p>
           <a:p>
             <a:pPr lvl="3"/>
@@ -2534,6 +2492,7 @@
               <a:rPr lang="ru-RU" smtClean="0"/>
               <a:t>Четвертый уровень</a:t>
             </a:r>
+            <a:endParaRPr lang="ru-RU" smtClean="0"/>
           </a:p>
           <a:p>
             <a:pPr lvl="4"/>
@@ -2580,7 +2539,6 @@
           <a:p>
             <a:fld id="{03C34D3A-21F5-4581-941C-C84EE2C2DBCA}" type="datetimeFigureOut">
               <a:rPr lang="ru-RU" smtClean="0"/>
-              <a:t>21.04.2026</a:t>
             </a:fld>
             <a:endParaRPr lang="ru-RU"/>
           </a:p>
@@ -2658,18 +2616,12 @@
           <a:p>
             <a:fld id="{0B5801A7-98A4-4FBC-932A-8D2DACE238E9}" type="slidenum">
               <a:rPr lang="ru-RU" smtClean="0"/>
-              <a:t>‹#›</a:t>
             </a:fld>
             <a:endParaRPr lang="ru-RU"/>
           </a:p>
         </p:txBody>
       </p:sp>
     </p:spTree>
-    <p:extLst>
-      <p:ext uri="{BB962C8B-B14F-4D97-AF65-F5344CB8AC3E}">
-        <p14:creationId xmlns:p14="http://schemas.microsoft.com/office/powerpoint/2010/main" val="3381657930"/>
-      </p:ext>
-    </p:extLst>
   </p:cSld>
   <p:clrMap bg1="lt1" tx1="dk1" bg2="lt2" tx2="dk2" accent1="accent1" accent2="accent2" accent3="accent3" accent4="accent4" accent5="accent5" accent6="accent6" hlink="hlink" folHlink="folHlink"/>
   <p:sldLayoutIdLst>
@@ -3013,8 +2965,8 @@
         </p:nvSpPr>
         <p:spPr>
           <a:xfrm>
-            <a:off x="1688869" y="0"/>
-            <a:ext cx="9144000" cy="2307197"/>
+            <a:off x="1689100" y="71755"/>
+            <a:ext cx="9144000" cy="2025650"/>
           </a:xfrm>
         </p:spPr>
         <p:txBody>
@@ -3048,7 +3000,7 @@
               </a:rPr>
               <a:t>ГОУ </a:t>
             </a:r>
-            <a:r>
+            <a:br>
               <a:rPr lang="ru-RU" sz="2800" b="1" dirty="0">
                 <a:solidFill>
                   <a:schemeClr val="bg1"/>
@@ -3056,7 +3008,16 @@
                 <a:ea typeface="Fraunces Extra Bold" pitchFamily="34" charset="-122"/>
                 <a:cs typeface="Times New Roman" panose="02020603050405020304" pitchFamily="18" charset="0"/>
               </a:rPr>
-              <a:t/>
+            </a:br>
+            <a:r>
+              <a:rPr lang="ru-RU" sz="2800" b="1" dirty="0">
+                <a:solidFill>
+                  <a:schemeClr val="bg1"/>
+                </a:solidFill>
+                <a:ea typeface="Fraunces Extra Bold" pitchFamily="34" charset="-122"/>
+                <a:cs typeface="Times New Roman" panose="02020603050405020304" pitchFamily="18" charset="0"/>
+              </a:rPr>
+              <a:t>ВО МО Государственное образовательное учреждение</a:t>
             </a:r>
             <a:br>
               <a:rPr lang="ru-RU" sz="2800" b="1" dirty="0">
@@ -3075,53 +3036,8 @@
                 <a:ea typeface="Fraunces Extra Bold" pitchFamily="34" charset="-122"/>
                 <a:cs typeface="Times New Roman" panose="02020603050405020304" pitchFamily="18" charset="0"/>
               </a:rPr>
-              <a:t>ВО МО Государственное образовательное учреждение</a:t>
-            </a:r>
-            <a:br>
-              <a:rPr lang="ru-RU" sz="2800" b="1" dirty="0">
-                <a:solidFill>
-                  <a:schemeClr val="bg1"/>
-                </a:solidFill>
-                <a:ea typeface="Fraunces Extra Bold" pitchFamily="34" charset="-122"/>
-                <a:cs typeface="Times New Roman" panose="02020603050405020304" pitchFamily="18" charset="0"/>
-              </a:rPr>
-            </a:br>
-            <a:r>
-              <a:rPr lang="ru-RU" sz="2800" b="1" dirty="0">
-                <a:solidFill>
-                  <a:schemeClr val="bg1"/>
-                </a:solidFill>
-                <a:ea typeface="Fraunces Extra Bold" pitchFamily="34" charset="-122"/>
-                <a:cs typeface="Times New Roman" panose="02020603050405020304" pitchFamily="18" charset="0"/>
-              </a:rPr>
               <a:t>высшего образования Московской области</a:t>
             </a:r>
-            <a:br>
-              <a:rPr lang="ru-RU" sz="2800" b="1" dirty="0">
-                <a:solidFill>
-                  <a:schemeClr val="bg1"/>
-                </a:solidFill>
-                <a:ea typeface="Fraunces Extra Bold" pitchFamily="34" charset="-122"/>
-                <a:cs typeface="Times New Roman" panose="02020603050405020304" pitchFamily="18" charset="0"/>
-              </a:rPr>
-            </a:br>
-            <a:r>
-              <a:rPr lang="en-US" sz="2800" b="1" dirty="0">
-                <a:solidFill>
-                  <a:schemeClr val="bg1"/>
-                </a:solidFill>
-                <a:cs typeface="Times New Roman" panose="02020603050405020304" pitchFamily="18" charset="0"/>
-              </a:rPr>
-              <a:t/>
-            </a:r>
-            <a:br>
-              <a:rPr lang="en-US" sz="2800" b="1" dirty="0">
-                <a:solidFill>
-                  <a:schemeClr val="bg1"/>
-                </a:solidFill>
-                <a:cs typeface="Times New Roman" panose="02020603050405020304" pitchFamily="18" charset="0"/>
-              </a:rPr>
-            </a:br>
             <a:endParaRPr lang="ru-RU" sz="2800" b="1" dirty="0">
               <a:solidFill>
                 <a:schemeClr val="bg1"/>
@@ -3234,9 +3150,7 @@
       <p:sp>
         <p:nvSpPr>
           <p:cNvPr id="4" name="Подзаголовок 2"/>
-          <p:cNvSpPr txBox="1">
-            <a:spLocks/>
-          </p:cNvSpPr>
+          <p:cNvSpPr txBox="1"/>
           <p:nvPr/>
         </p:nvSpPr>
         <p:spPr>
@@ -3425,6 +3339,11 @@
               </a:rPr>
               <a:t>09.02.07 УП.11 25</a:t>
             </a:r>
+            <a:endParaRPr lang="ru-RU" b="1" dirty="0" smtClean="0">
+              <a:solidFill>
+                <a:schemeClr val="bg1"/>
+              </a:solidFill>
+            </a:endParaRPr>
           </a:p>
           <a:p>
             <a:r>
@@ -3497,11 +3416,6 @@
         </p:txBody>
       </p:sp>
     </p:spTree>
-    <p:extLst>
-      <p:ext uri="{BB962C8B-B14F-4D97-AF65-F5344CB8AC3E}">
-        <p14:creationId xmlns:p14="http://schemas.microsoft.com/office/powerpoint/2010/main" val="2904238748"/>
-      </p:ext>
-    </p:extLst>
   </p:cSld>
   <p:clrMapOvr>
     <a:masterClrMapping/>
@@ -3567,20 +3481,20 @@
         </p:spPr>
         <p:txBody>
           <a:bodyPr>
-            <a:normAutofit/>
+            <a:normAutofit fontScale="90000"/>
           </a:bodyPr>
           <a:lstStyle/>
           <a:p>
             <a:pPr algn="l"/>
             <a:r>
-              <a:rPr lang="ru-RU" sz="4000" dirty="0" smtClean="0">
+              <a:rPr lang="ru-RU" sz="4445" dirty="0" smtClean="0">
                 <a:solidFill>
                   <a:schemeClr val="bg1"/>
                 </a:solidFill>
               </a:rPr>
               <a:t>Триггеры</a:t>
             </a:r>
-            <a:endParaRPr lang="ru-RU" sz="4000" dirty="0">
+            <a:endParaRPr lang="ru-RU" sz="4445" dirty="0">
               <a:solidFill>
                 <a:schemeClr val="bg1"/>
               </a:solidFill>
@@ -3596,8 +3510,8 @@
         </p:nvSpPr>
         <p:spPr>
           <a:xfrm>
-            <a:off x="861" y="789630"/>
-            <a:ext cx="6774024" cy="923330"/>
+            <a:off x="635" y="789940"/>
+            <a:ext cx="8243570" cy="1106805"/>
           </a:xfrm>
           <a:prstGeom prst="rect">
             <a:avLst/>
@@ -3611,14 +3525,14 @@
           <a:p>
             <a:pPr algn="just"/>
             <a:r>
-              <a:rPr lang="ru-RU" dirty="0">
+              <a:rPr lang="ru-RU" sz="2200" dirty="0">
                 <a:solidFill>
                   <a:schemeClr val="bg1"/>
                 </a:solidFill>
               </a:rPr>
               <a:t>Триггеры - автоматически выполняемые процедуры, активируемые при наступлении определенных событий (INSERT, UPDATE, DELETE) с таблицами.</a:t>
             </a:r>
-            <a:endParaRPr lang="ru-RU" b="1" dirty="0">
+            <a:endParaRPr lang="ru-RU" sz="2200" b="1" dirty="0">
               <a:solidFill>
                 <a:schemeClr val="bg1"/>
               </a:solidFill>
@@ -3672,6 +3586,11 @@
               </a:rPr>
               <a:t> преподавателя</a:t>
             </a:r>
+            <a:endParaRPr lang="ru-RU" dirty="0" smtClean="0">
+              <a:solidFill>
+                <a:schemeClr val="bg1"/>
+              </a:solidFill>
+            </a:endParaRPr>
           </a:p>
           <a:p>
             <a:r>
@@ -3713,7 +3632,7 @@
           <p:nvPr/>
         </p:nvPicPr>
         <p:blipFill>
-          <a:blip r:embed="rId2"/>
+          <a:blip r:embed="rId1"/>
           <a:stretch>
             <a:fillRect/>
           </a:stretch>
@@ -3784,6 +3703,12 @@
               </a:rPr>
               <a:t>BEFORE INSERT ON Professor</a:t>
             </a:r>
+            <a:endParaRPr lang="en-US" sz="1500" i="1" dirty="0" smtClean="0">
+              <a:solidFill>
+                <a:srgbClr val="00FFFF"/>
+              </a:solidFill>
+              <a:latin typeface="Consolas" panose="020B0609020204030204" pitchFamily="49" charset="0"/>
+            </a:endParaRPr>
           </a:p>
           <a:p>
             <a:r>
@@ -3795,6 +3720,12 @@
               </a:rPr>
               <a:t>FOR EACH ROW</a:t>
             </a:r>
+            <a:endParaRPr lang="en-US" sz="1500" i="1" dirty="0" smtClean="0">
+              <a:solidFill>
+                <a:srgbClr val="00FFFF"/>
+              </a:solidFill>
+              <a:latin typeface="Consolas" panose="020B0609020204030204" pitchFamily="49" charset="0"/>
+            </a:endParaRPr>
           </a:p>
           <a:p>
             <a:r>
@@ -3806,6 +3737,12 @@
               </a:rPr>
               <a:t>BEGIN</a:t>
             </a:r>
+            <a:endParaRPr lang="en-US" sz="1500" i="1" dirty="0" smtClean="0">
+              <a:solidFill>
+                <a:srgbClr val="00FFFF"/>
+              </a:solidFill>
+              <a:latin typeface="Consolas" panose="020B0609020204030204" pitchFamily="49" charset="0"/>
+            </a:endParaRPr>
           </a:p>
           <a:p>
             <a:r>
@@ -3853,6 +3790,12 @@
               </a:rPr>
               <a:t> NOT LIKE '%@%' THEN</a:t>
             </a:r>
+            <a:endParaRPr lang="en-US" sz="1500" i="1" dirty="0" smtClean="0">
+              <a:solidFill>
+                <a:srgbClr val="00FFFF"/>
+              </a:solidFill>
+              <a:latin typeface="Consolas" panose="020B0609020204030204" pitchFamily="49" charset="0"/>
+            </a:endParaRPr>
           </a:p>
           <a:p>
             <a:r>
@@ -3864,6 +3807,12 @@
               </a:rPr>
               <a:t>        SIGNAL SQLSTATE '45000' </a:t>
             </a:r>
+            <a:endParaRPr lang="en-US" sz="1500" i="1" dirty="0" smtClean="0">
+              <a:solidFill>
+                <a:srgbClr val="00FFFF"/>
+              </a:solidFill>
+              <a:latin typeface="Consolas" panose="020B0609020204030204" pitchFamily="49" charset="0"/>
+            </a:endParaRPr>
           </a:p>
           <a:p>
             <a:r>
@@ -3884,6 +3833,12 @@
               </a:rPr>
               <a:t>преподавателя должен содержать @';</a:t>
             </a:r>
+            <a:endParaRPr lang="ru-RU" sz="1500" i="1" dirty="0" smtClean="0">
+              <a:solidFill>
+                <a:srgbClr val="00FFFF"/>
+              </a:solidFill>
+              <a:latin typeface="Consolas" panose="020B0609020204030204" pitchFamily="49" charset="0"/>
+            </a:endParaRPr>
           </a:p>
           <a:p>
             <a:r>
@@ -3904,6 +3859,12 @@
               </a:rPr>
               <a:t>END IF;</a:t>
             </a:r>
+            <a:endParaRPr lang="en-US" sz="1500" i="1" dirty="0" smtClean="0">
+              <a:solidFill>
+                <a:srgbClr val="00FFFF"/>
+              </a:solidFill>
+              <a:latin typeface="Consolas" panose="020B0609020204030204" pitchFamily="49" charset="0"/>
+            </a:endParaRPr>
           </a:p>
           <a:p>
             <a:r>
@@ -3915,8 +3876,6 @@
               </a:rPr>
               <a:t>END//</a:t>
             </a:r>
-          </a:p>
-          <a:p>
             <a:endParaRPr lang="en-US" sz="1500" i="1" dirty="0" smtClean="0">
               <a:solidFill>
                 <a:srgbClr val="00FFFF"/>
@@ -3925,6 +3884,14 @@
             </a:endParaRPr>
           </a:p>
           <a:p>
+            <a:endParaRPr lang="en-US" sz="1500" i="1" dirty="0" smtClean="0">
+              <a:solidFill>
+                <a:srgbClr val="00FFFF"/>
+              </a:solidFill>
+              <a:latin typeface="Consolas" panose="020B0609020204030204" pitchFamily="49" charset="0"/>
+            </a:endParaRPr>
+          </a:p>
+          <a:p>
             <a:r>
               <a:rPr lang="en-US" sz="1500" i="1" dirty="0" smtClean="0">
                 <a:solidFill>
@@ -3952,6 +3919,12 @@
               </a:rPr>
               <a:t>, email) </a:t>
             </a:r>
+            <a:endParaRPr lang="en-US" sz="1500" i="1" dirty="0" smtClean="0">
+              <a:solidFill>
+                <a:srgbClr val="00FFFF"/>
+              </a:solidFill>
+              <a:latin typeface="Consolas" panose="020B0609020204030204" pitchFamily="49" charset="0"/>
+            </a:endParaRPr>
           </a:p>
           <a:p>
             <a:r>
@@ -3990,12 +3963,52 @@
           </a:p>
         </p:txBody>
       </p:sp>
+      <p:sp>
+        <p:nvSpPr>
+          <p:cNvPr id="5" name="Текстовое поле 4">
+            <a:hlinkClick r:id="rId2" action="ppaction://hlinksldjump"/>
+          </p:cNvPr>
+          <p:cNvSpPr txBox="1"/>
+          <p:nvPr/>
+        </p:nvSpPr>
+        <p:spPr>
+          <a:xfrm>
+            <a:off x="10215880" y="208280"/>
+            <a:ext cx="1758315" cy="429895"/>
+          </a:xfrm>
+          <a:prstGeom prst="rect">
+            <a:avLst/>
+          </a:prstGeom>
+          <a:noFill/>
+        </p:spPr>
+        <p:txBody>
+          <a:bodyPr wrap="square" rtlCol="0" anchor="t">
+            <a:spAutoFit/>
+          </a:bodyPr>
+          <a:p>
+            <a:r>
+              <a:rPr lang="ru-RU" altLang="en-US" sz="2200" dirty="0" smtClean="0">
+                <a:solidFill>
+                  <a:schemeClr val="bg1"/>
+                </a:solidFill>
+                <a:effectLst/>
+                <a:latin typeface="quote-cjk-patch"/>
+                <a:sym typeface="+mn-ea"/>
+              </a:rPr>
+              <a:t>Оглавление</a:t>
+            </a:r>
+            <a:endParaRPr lang="ru-RU" altLang="en-US" sz="2200" dirty="0" smtClean="0">
+              <a:solidFill>
+                <a:schemeClr val="bg1"/>
+              </a:solidFill>
+              <a:effectLst/>
+              <a:latin typeface="quote-cjk-patch"/>
+              <a:sym typeface="+mn-ea"/>
+            </a:endParaRPr>
+          </a:p>
+        </p:txBody>
+      </p:sp>
     </p:spTree>
-    <p:extLst>
-      <p:ext uri="{BB962C8B-B14F-4D97-AF65-F5344CB8AC3E}">
-        <p14:creationId xmlns:p14="http://schemas.microsoft.com/office/powerpoint/2010/main" val="3458802639"/>
-      </p:ext>
-    </p:extLst>
   </p:cSld>
   <p:clrMapOvr>
     <a:masterClrMapping/>
@@ -4061,7 +4074,7 @@
         </p:spPr>
         <p:txBody>
           <a:bodyPr>
-            <a:normAutofit/>
+            <a:normAutofit fontScale="90000"/>
           </a:bodyPr>
           <a:lstStyle/>
           <a:p>
@@ -4079,39 +4092,6 @@
                 <a:schemeClr val="bg1"/>
               </a:solidFill>
             </a:endParaRPr>
-          </a:p>
-        </p:txBody>
-      </p:sp>
-      <p:sp>
-        <p:nvSpPr>
-          <p:cNvPr id="3" name="Прямоугольник 2"/>
-          <p:cNvSpPr/>
-          <p:nvPr/>
-        </p:nvSpPr>
-        <p:spPr>
-          <a:xfrm>
-            <a:off x="861" y="789630"/>
-            <a:ext cx="6774024" cy="923330"/>
-          </a:xfrm>
-          <a:prstGeom prst="rect">
-            <a:avLst/>
-          </a:prstGeom>
-        </p:spPr>
-        <p:txBody>
-          <a:bodyPr wrap="square">
-            <a:spAutoFit/>
-          </a:bodyPr>
-          <a:lstStyle/>
-          <a:p>
-            <a:pPr algn="just"/>
-            <a:r>
-              <a:rPr lang="ru-RU" dirty="0">
-                <a:solidFill>
-                  <a:schemeClr val="bg1"/>
-                </a:solidFill>
-              </a:rPr>
-              <a:t>Обработка ошибок - механизм перехвата и обработки исключительных ситуаций в хранимых процедурах и функциях для обеспечения надежности приложений.</a:t>
-            </a:r>
           </a:p>
         </p:txBody>
       </p:sp>
@@ -4160,7 +4140,7 @@
         </p:nvSpPr>
         <p:spPr>
           <a:xfrm>
-            <a:off x="142179" y="1758322"/>
+            <a:off x="142179" y="894722"/>
             <a:ext cx="6096000" cy="3093154"/>
           </a:xfrm>
           <a:prstGeom prst="rect">
@@ -4182,6 +4162,12 @@
               </a:rPr>
               <a:t>CREATE PROCEDURE 5_Drop_BD_MonitoringSystem()</a:t>
             </a:r>
+            <a:endParaRPr lang="en-US" sz="1500" i="1" dirty="0" smtClean="0">
+              <a:solidFill>
+                <a:srgbClr val="00FFFF"/>
+              </a:solidFill>
+              <a:latin typeface="Consolas" panose="020B0609020204030204" pitchFamily="49" charset="0"/>
+            </a:endParaRPr>
           </a:p>
           <a:p>
             <a:r>
@@ -4193,6 +4179,12 @@
               </a:rPr>
               <a:t>BEGIN</a:t>
             </a:r>
+            <a:endParaRPr lang="en-US" sz="1500" i="1" dirty="0" smtClean="0">
+              <a:solidFill>
+                <a:srgbClr val="00FFFF"/>
+              </a:solidFill>
+              <a:latin typeface="Consolas" panose="020B0609020204030204" pitchFamily="49" charset="0"/>
+            </a:endParaRPr>
           </a:p>
           <a:p>
             <a:r>
@@ -4204,6 +4196,12 @@
               </a:rPr>
               <a:t>    DECLARE EXIT HANDLER FOR 1008</a:t>
             </a:r>
+            <a:endParaRPr lang="en-US" sz="1500" i="1" dirty="0" smtClean="0">
+              <a:solidFill>
+                <a:srgbClr val="00FFFF"/>
+              </a:solidFill>
+              <a:latin typeface="Consolas" panose="020B0609020204030204" pitchFamily="49" charset="0"/>
+            </a:endParaRPr>
           </a:p>
           <a:p>
             <a:r>
@@ -4215,6 +4213,12 @@
               </a:rPr>
               <a:t>    BEGIN</a:t>
             </a:r>
+            <a:endParaRPr lang="en-US" sz="1500" i="1" dirty="0" smtClean="0">
+              <a:solidFill>
+                <a:srgbClr val="00FFFF"/>
+              </a:solidFill>
+              <a:latin typeface="Consolas" panose="020B0609020204030204" pitchFamily="49" charset="0"/>
+            </a:endParaRPr>
           </a:p>
           <a:p>
             <a:r>
@@ -4280,6 +4284,12 @@
               </a:rPr>
               <a:t>Ошибка';</a:t>
             </a:r>
+            <a:endParaRPr lang="ru-RU" sz="1500" i="1" dirty="0" smtClean="0">
+              <a:solidFill>
+                <a:srgbClr val="00FFFF"/>
+              </a:solidFill>
+              <a:latin typeface="Consolas" panose="020B0609020204030204" pitchFamily="49" charset="0"/>
+            </a:endParaRPr>
           </a:p>
           <a:p>
             <a:r>
@@ -4300,6 +4310,12 @@
               </a:rPr>
               <a:t>END;</a:t>
             </a:r>
+            <a:endParaRPr lang="en-US" sz="1500" i="1" dirty="0" smtClean="0">
+              <a:solidFill>
+                <a:srgbClr val="00FFFF"/>
+              </a:solidFill>
+              <a:latin typeface="Consolas" panose="020B0609020204030204" pitchFamily="49" charset="0"/>
+            </a:endParaRPr>
           </a:p>
           <a:p>
             <a:r>
@@ -4311,6 +4327,12 @@
               </a:rPr>
               <a:t>    </a:t>
             </a:r>
+            <a:endParaRPr lang="en-US" sz="1500" i="1" dirty="0" smtClean="0">
+              <a:solidFill>
+                <a:srgbClr val="00FFFF"/>
+              </a:solidFill>
+              <a:latin typeface="Consolas" panose="020B0609020204030204" pitchFamily="49" charset="0"/>
+            </a:endParaRPr>
           </a:p>
           <a:p>
             <a:r>
@@ -4340,6 +4362,12 @@
               </a:rPr>
               <a:t>;</a:t>
             </a:r>
+            <a:endParaRPr lang="en-US" sz="1500" i="1" dirty="0" smtClean="0">
+              <a:solidFill>
+                <a:srgbClr val="00FFFF"/>
+              </a:solidFill>
+              <a:latin typeface="Consolas" panose="020B0609020204030204" pitchFamily="49" charset="0"/>
+            </a:endParaRPr>
           </a:p>
           <a:p>
             <a:r>
@@ -4351,8 +4379,6 @@
               </a:rPr>
               <a:t>END//</a:t>
             </a:r>
-          </a:p>
-          <a:p>
             <a:endParaRPr lang="en-US" sz="1500" i="1" dirty="0" smtClean="0">
               <a:solidFill>
                 <a:srgbClr val="00FFFF"/>
@@ -4361,6 +4387,14 @@
             </a:endParaRPr>
           </a:p>
           <a:p>
+            <a:endParaRPr lang="en-US" sz="1500" i="1" dirty="0" smtClean="0">
+              <a:solidFill>
+                <a:srgbClr val="00FFFF"/>
+              </a:solidFill>
+              <a:latin typeface="Consolas" panose="020B0609020204030204" pitchFamily="49" charset="0"/>
+            </a:endParaRPr>
+          </a:p>
+          <a:p>
             <a:r>
               <a:rPr lang="en-US" sz="1500" i="1" dirty="0" smtClean="0">
                 <a:solidFill>
@@ -4370,6 +4404,12 @@
               </a:rPr>
               <a:t>DELIMITER ;</a:t>
             </a:r>
+            <a:endParaRPr lang="en-US" sz="1500" i="1" dirty="0" smtClean="0">
+              <a:solidFill>
+                <a:srgbClr val="00FFFF"/>
+              </a:solidFill>
+              <a:latin typeface="Consolas" panose="020B0609020204030204" pitchFamily="49" charset="0"/>
+            </a:endParaRPr>
           </a:p>
           <a:p>
             <a:r>
@@ -4415,7 +4455,7 @@
           <p:nvPr/>
         </p:nvPicPr>
         <p:blipFill>
-          <a:blip r:embed="rId2"/>
+          <a:blip r:embed="rId1"/>
           <a:stretch>
             <a:fillRect/>
           </a:stretch>
@@ -4430,12 +4470,251 @@
           </a:prstGeom>
         </p:spPr>
       </p:pic>
+      <p:sp>
+        <p:nvSpPr>
+          <p:cNvPr id="6" name="Текстовое поле 5">
+            <a:hlinkClick r:id="rId2" action="ppaction://hlinksldjump"/>
+          </p:cNvPr>
+          <p:cNvSpPr txBox="1"/>
+          <p:nvPr/>
+        </p:nvSpPr>
+        <p:spPr>
+          <a:xfrm>
+            <a:off x="10215880" y="208280"/>
+            <a:ext cx="1758315" cy="429895"/>
+          </a:xfrm>
+          <a:prstGeom prst="rect">
+            <a:avLst/>
+          </a:prstGeom>
+          <a:noFill/>
+        </p:spPr>
+        <p:txBody>
+          <a:bodyPr wrap="square" rtlCol="0" anchor="t">
+            <a:spAutoFit/>
+          </a:bodyPr>
+          <a:p>
+            <a:r>
+              <a:rPr lang="ru-RU" altLang="en-US" sz="2200" dirty="0" smtClean="0">
+                <a:solidFill>
+                  <a:schemeClr val="bg1"/>
+                </a:solidFill>
+                <a:effectLst/>
+                <a:latin typeface="quote-cjk-patch"/>
+                <a:sym typeface="+mn-ea"/>
+              </a:rPr>
+              <a:t>Оглавление</a:t>
+            </a:r>
+            <a:endParaRPr lang="ru-RU" altLang="en-US" sz="2200" dirty="0" smtClean="0">
+              <a:solidFill>
+                <a:schemeClr val="bg1"/>
+              </a:solidFill>
+              <a:effectLst/>
+              <a:latin typeface="quote-cjk-patch"/>
+              <a:sym typeface="+mn-ea"/>
+            </a:endParaRPr>
+          </a:p>
+        </p:txBody>
+      </p:sp>
+      <p:sp>
+        <p:nvSpPr>
+          <p:cNvPr id="7" name="Текстовое поле 6"/>
+          <p:cNvSpPr txBox="1"/>
+          <p:nvPr/>
+        </p:nvSpPr>
+        <p:spPr>
+          <a:xfrm>
+            <a:off x="6464935" y="744220"/>
+            <a:ext cx="5080000" cy="3322955"/>
+          </a:xfrm>
+          <a:prstGeom prst="rect">
+            <a:avLst/>
+          </a:prstGeom>
+        </p:spPr>
+        <p:txBody>
+          <a:bodyPr>
+            <a:spAutoFit/>
+          </a:bodyPr>
+          <a:p>
+            <a:pPr defTabSz="266700">
+              <a:lnSpc>
+                <a:spcPct val="100000"/>
+              </a:lnSpc>
+            </a:pPr>
+            <a:r>
+              <a:rPr sz="1500" i="1">
+                <a:solidFill>
+                  <a:srgbClr val="00FFFF"/>
+                </a:solidFill>
+                <a:latin typeface="Consolas" panose="020B0609020204030204"/>
+                <a:ea typeface="Calibri" panose="020F0502020204030204"/>
+              </a:rPr>
+              <a:t>CREATE USER IF NOT EXISTS 'student_user'@'localhost' IDENTIFIED BY 'student123';</a:t>
+            </a:r>
+            <a:endParaRPr sz="1500" i="1">
+              <a:solidFill>
+                <a:srgbClr val="00FFFF"/>
+              </a:solidFill>
+              <a:latin typeface="Consolas" panose="020B0609020204030204"/>
+              <a:ea typeface="Calibri" panose="020F0502020204030204"/>
+            </a:endParaRPr>
+          </a:p>
+          <a:p>
+            <a:pPr defTabSz="266700">
+              <a:lnSpc>
+                <a:spcPct val="100000"/>
+              </a:lnSpc>
+            </a:pPr>
+            <a:r>
+              <a:rPr sz="1500" i="1">
+                <a:solidFill>
+                  <a:srgbClr val="00FFFF"/>
+                </a:solidFill>
+                <a:latin typeface="Consolas" panose="020B0609020204030204"/>
+                <a:ea typeface="Calibri" panose="020F0502020204030204"/>
+              </a:rPr>
+              <a:t>CREATE USER IF NOT EXISTS 'professor_user'@'localhost' IDENTIFIED BY 'professor123';</a:t>
+            </a:r>
+            <a:endParaRPr sz="1500" i="1">
+              <a:solidFill>
+                <a:srgbClr val="00FFFF"/>
+              </a:solidFill>
+              <a:latin typeface="Consolas" panose="020B0609020204030204"/>
+              <a:ea typeface="Calibri" panose="020F0502020204030204"/>
+            </a:endParaRPr>
+          </a:p>
+          <a:p>
+            <a:pPr defTabSz="266700">
+              <a:lnSpc>
+                <a:spcPct val="100000"/>
+              </a:lnSpc>
+            </a:pPr>
+            <a:r>
+              <a:rPr sz="1500" i="1">
+                <a:solidFill>
+                  <a:srgbClr val="00FFFF"/>
+                </a:solidFill>
+                <a:latin typeface="Consolas" panose="020B0609020204030204"/>
+                <a:ea typeface="Calibri" panose="020F0502020204030204"/>
+              </a:rPr>
+              <a:t>GRANT SELECT ON MonitoringSystem.Faculty TO 'student_user'@'localhost';</a:t>
+            </a:r>
+            <a:endParaRPr sz="1500" i="1">
+              <a:solidFill>
+                <a:srgbClr val="00FFFF"/>
+              </a:solidFill>
+              <a:latin typeface="Consolas" panose="020B0609020204030204"/>
+              <a:ea typeface="Calibri" panose="020F0502020204030204"/>
+            </a:endParaRPr>
+          </a:p>
+          <a:p>
+            <a:pPr defTabSz="266700">
+              <a:lnSpc>
+                <a:spcPct val="100000"/>
+              </a:lnSpc>
+            </a:pPr>
+            <a:r>
+              <a:rPr sz="1500" i="1">
+                <a:solidFill>
+                  <a:srgbClr val="00FFFF"/>
+                </a:solidFill>
+                <a:latin typeface="Consolas" panose="020B0609020204030204"/>
+                <a:ea typeface="Calibri" panose="020F0502020204030204"/>
+              </a:rPr>
+              <a:t>GRANT SELECT ON MonitoringSystem.Department TO 'student_user'@'localhost';</a:t>
+            </a:r>
+            <a:endParaRPr sz="1500" i="1">
+              <a:solidFill>
+                <a:srgbClr val="00FFFF"/>
+              </a:solidFill>
+              <a:latin typeface="Consolas" panose="020B0609020204030204"/>
+              <a:ea typeface="Calibri" panose="020F0502020204030204"/>
+            </a:endParaRPr>
+          </a:p>
+          <a:p>
+            <a:pPr defTabSz="266700">
+              <a:lnSpc>
+                <a:spcPct val="100000"/>
+              </a:lnSpc>
+            </a:pPr>
+            <a:r>
+              <a:rPr sz="1500" i="1">
+                <a:solidFill>
+                  <a:srgbClr val="00FFFF"/>
+                </a:solidFill>
+                <a:latin typeface="Consolas" panose="020B0609020204030204"/>
+                <a:ea typeface="Calibri" panose="020F0502020204030204"/>
+              </a:rPr>
+              <a:t>GRANT SELECT ON MonitoringSystem.DirectionType TO 'student_user'@'localhost';</a:t>
+            </a:r>
+            <a:br>
+              <a:rPr sz="1500" i="1">
+                <a:solidFill>
+                  <a:srgbClr val="00FFFF"/>
+                </a:solidFill>
+                <a:latin typeface="Consolas" panose="020B0609020204030204"/>
+                <a:ea typeface="Calibri" panose="020F0502020204030204"/>
+              </a:rPr>
+            </a:br>
+            <a:r>
+              <a:rPr lang="ru-RU" sz="1500" i="1">
+                <a:solidFill>
+                  <a:srgbClr val="00FFFF"/>
+                </a:solidFill>
+                <a:latin typeface="Consolas" panose="020B0609020204030204"/>
+                <a:ea typeface="Calibri" panose="020F0502020204030204"/>
+              </a:rPr>
+              <a:t>...</a:t>
+            </a:r>
+            <a:endParaRPr sz="1500" i="1">
+              <a:solidFill>
+                <a:srgbClr val="00FFFF"/>
+              </a:solidFill>
+              <a:latin typeface="Consolas" panose="020B0609020204030204"/>
+              <a:ea typeface="Calibri" panose="020F0502020204030204"/>
+            </a:endParaRPr>
+          </a:p>
+          <a:p>
+            <a:pPr defTabSz="266700">
+              <a:lnSpc>
+                <a:spcPct val="100000"/>
+              </a:lnSpc>
+            </a:pPr>
+            <a:endParaRPr sz="1500" i="1">
+              <a:solidFill>
+                <a:srgbClr val="00FFFF"/>
+              </a:solidFill>
+              <a:latin typeface="Consolas" panose="020B0609020204030204"/>
+              <a:ea typeface="Calibri" panose="020F0502020204030204"/>
+            </a:endParaRPr>
+          </a:p>
+        </p:txBody>
+      </p:sp>
+      <p:pic>
+        <p:nvPicPr>
+          <p:cNvPr id="63" name="Рисунок 63"/>
+          <p:cNvPicPr>
+            <a:picLocks noChangeAspect="1"/>
+          </p:cNvPicPr>
+          <p:nvPr/>
+        </p:nvPicPr>
+        <p:blipFill>
+          <a:blip r:embed="rId3"/>
+          <a:srcRect t="85398"/>
+          <a:stretch>
+            <a:fillRect/>
+          </a:stretch>
+        </p:blipFill>
+        <p:spPr>
+          <a:xfrm>
+            <a:off x="4990465" y="3918585"/>
+            <a:ext cx="6983730" cy="572135"/>
+          </a:xfrm>
+          <a:prstGeom prst="rect">
+            <a:avLst/>
+          </a:prstGeom>
+        </p:spPr>
+      </p:pic>
     </p:spTree>
-    <p:extLst>
-      <p:ext uri="{BB962C8B-B14F-4D97-AF65-F5344CB8AC3E}">
-        <p14:creationId xmlns:p14="http://schemas.microsoft.com/office/powerpoint/2010/main" val="3444391125"/>
-      </p:ext>
-    </p:extLst>
   </p:cSld>
   <p:clrMapOvr>
     <a:masterClrMapping/>
@@ -4501,7 +4780,7 @@
         </p:spPr>
         <p:txBody>
           <a:bodyPr>
-            <a:normAutofit/>
+            <a:normAutofit fontScale="90000"/>
           </a:bodyPr>
           <a:lstStyle/>
           <a:p>
@@ -4600,6 +4879,11 @@
               </a:rPr>
               <a:t>.</a:t>
             </a:r>
+            <a:endParaRPr lang="ru-RU" dirty="0">
+              <a:solidFill>
+                <a:schemeClr val="bg1"/>
+              </a:solidFill>
+            </a:endParaRPr>
           </a:p>
         </p:txBody>
       </p:sp>
@@ -4610,7 +4894,7 @@
           <p:nvPr/>
         </p:nvPicPr>
         <p:blipFill>
-          <a:blip r:embed="rId2">
+          <a:blip r:embed="rId1">
             <a:extLst>
               <a:ext uri="{28A0092B-C50C-407E-A947-70E740481C1C}">
                 <a14:useLocalDpi xmlns:a14="http://schemas.microsoft.com/office/drawing/2010/main" val="0"/>
@@ -4636,12 +4920,52 @@
           </a:ln>
         </p:spPr>
       </p:pic>
+      <p:sp>
+        <p:nvSpPr>
+          <p:cNvPr id="6" name="Текстовое поле 5">
+            <a:hlinkClick r:id="rId2" action="ppaction://hlinksldjump"/>
+          </p:cNvPr>
+          <p:cNvSpPr txBox="1"/>
+          <p:nvPr/>
+        </p:nvSpPr>
+        <p:spPr>
+          <a:xfrm>
+            <a:off x="10215880" y="208280"/>
+            <a:ext cx="1758315" cy="429895"/>
+          </a:xfrm>
+          <a:prstGeom prst="rect">
+            <a:avLst/>
+          </a:prstGeom>
+          <a:noFill/>
+        </p:spPr>
+        <p:txBody>
+          <a:bodyPr wrap="square" rtlCol="0" anchor="t">
+            <a:spAutoFit/>
+          </a:bodyPr>
+          <a:p>
+            <a:r>
+              <a:rPr lang="ru-RU" altLang="en-US" sz="2200" dirty="0" smtClean="0">
+                <a:solidFill>
+                  <a:schemeClr val="bg1"/>
+                </a:solidFill>
+                <a:effectLst/>
+                <a:latin typeface="quote-cjk-patch"/>
+                <a:sym typeface="+mn-ea"/>
+              </a:rPr>
+              <a:t>Оглавление</a:t>
+            </a:r>
+            <a:endParaRPr lang="ru-RU" altLang="en-US" sz="2200" dirty="0" smtClean="0">
+              <a:solidFill>
+                <a:schemeClr val="bg1"/>
+              </a:solidFill>
+              <a:effectLst/>
+              <a:latin typeface="quote-cjk-patch"/>
+              <a:sym typeface="+mn-ea"/>
+            </a:endParaRPr>
+          </a:p>
+        </p:txBody>
+      </p:sp>
     </p:spTree>
-    <p:extLst>
-      <p:ext uri="{BB962C8B-B14F-4D97-AF65-F5344CB8AC3E}">
-        <p14:creationId xmlns:p14="http://schemas.microsoft.com/office/powerpoint/2010/main" val="1243701147"/>
-      </p:ext>
-    </p:extLst>
   </p:cSld>
   <p:clrMapOvr>
     <a:masterClrMapping/>
@@ -4707,7 +5031,7 @@
         </p:spPr>
         <p:txBody>
           <a:bodyPr>
-            <a:normAutofit/>
+            <a:normAutofit fontScale="90000"/>
           </a:bodyPr>
           <a:lstStyle/>
           <a:p>
@@ -5303,7 +5627,7 @@
           <p:nvPr/>
         </p:nvPicPr>
         <p:blipFill>
-          <a:blip r:embed="rId2"/>
+          <a:blip r:embed="rId1"/>
           <a:stretch>
             <a:fillRect/>
           </a:stretch>
@@ -5943,7 +6267,7 @@
           <p:nvPr/>
         </p:nvPicPr>
         <p:blipFill>
-          <a:blip r:embed="rId3"/>
+          <a:blip r:embed="rId2"/>
           <a:stretch>
             <a:fillRect/>
           </a:stretch>
@@ -5958,12 +6282,52 @@
           </a:prstGeom>
         </p:spPr>
       </p:pic>
+      <p:sp>
+        <p:nvSpPr>
+          <p:cNvPr id="3" name="Текстовое поле 2">
+            <a:hlinkClick r:id="rId3" action="ppaction://hlinksldjump"/>
+          </p:cNvPr>
+          <p:cNvSpPr txBox="1"/>
+          <p:nvPr/>
+        </p:nvSpPr>
+        <p:spPr>
+          <a:xfrm>
+            <a:off x="10215880" y="208280"/>
+            <a:ext cx="1758315" cy="429895"/>
+          </a:xfrm>
+          <a:prstGeom prst="rect">
+            <a:avLst/>
+          </a:prstGeom>
+          <a:noFill/>
+        </p:spPr>
+        <p:txBody>
+          <a:bodyPr wrap="square" rtlCol="0" anchor="t">
+            <a:spAutoFit/>
+          </a:bodyPr>
+          <a:p>
+            <a:r>
+              <a:rPr lang="ru-RU" altLang="en-US" sz="2200" dirty="0" smtClean="0">
+                <a:solidFill>
+                  <a:schemeClr val="bg1"/>
+                </a:solidFill>
+                <a:effectLst/>
+                <a:latin typeface="quote-cjk-patch"/>
+                <a:sym typeface="+mn-ea"/>
+              </a:rPr>
+              <a:t>Оглавление</a:t>
+            </a:r>
+            <a:endParaRPr lang="ru-RU" altLang="en-US" sz="2200" dirty="0" smtClean="0">
+              <a:solidFill>
+                <a:schemeClr val="bg1"/>
+              </a:solidFill>
+              <a:effectLst/>
+              <a:latin typeface="quote-cjk-patch"/>
+              <a:sym typeface="+mn-ea"/>
+            </a:endParaRPr>
+          </a:p>
+        </p:txBody>
+      </p:sp>
     </p:spTree>
-    <p:extLst>
-      <p:ext uri="{BB962C8B-B14F-4D97-AF65-F5344CB8AC3E}">
-        <p14:creationId xmlns:p14="http://schemas.microsoft.com/office/powerpoint/2010/main" val="3230931282"/>
-      </p:ext>
-    </p:extLst>
   </p:cSld>
   <p:clrMapOvr>
     <a:masterClrMapping/>
@@ -6029,7 +6393,7 @@
         </p:spPr>
         <p:txBody>
           <a:bodyPr>
-            <a:normAutofit/>
+            <a:normAutofit fontScale="90000"/>
           </a:bodyPr>
           <a:lstStyle/>
           <a:p>
@@ -6089,7 +6453,7 @@
           <p:nvPr/>
         </p:nvPicPr>
         <p:blipFill>
-          <a:blip r:embed="rId2"/>
+          <a:blip r:embed="rId1"/>
           <a:stretch>
             <a:fillRect/>
           </a:stretch>
@@ -6111,7 +6475,7 @@
           <p:nvPr/>
         </p:nvPicPr>
         <p:blipFill>
-          <a:blip r:embed="rId3"/>
+          <a:blip r:embed="rId2"/>
           <a:stretch>
             <a:fillRect/>
           </a:stretch>
@@ -6133,7 +6497,7 @@
           <p:nvPr/>
         </p:nvPicPr>
         <p:blipFill>
-          <a:blip r:embed="rId4"/>
+          <a:blip r:embed="rId3"/>
           <a:stretch>
             <a:fillRect/>
           </a:stretch>
@@ -6148,12 +6512,52 @@
           </a:prstGeom>
         </p:spPr>
       </p:pic>
+      <p:sp>
+        <p:nvSpPr>
+          <p:cNvPr id="5" name="Текстовое поле 4">
+            <a:hlinkClick r:id="rId4" action="ppaction://hlinksldjump"/>
+          </p:cNvPr>
+          <p:cNvSpPr txBox="1"/>
+          <p:nvPr/>
+        </p:nvSpPr>
+        <p:spPr>
+          <a:xfrm>
+            <a:off x="10215880" y="208280"/>
+            <a:ext cx="1758315" cy="429895"/>
+          </a:xfrm>
+          <a:prstGeom prst="rect">
+            <a:avLst/>
+          </a:prstGeom>
+          <a:noFill/>
+        </p:spPr>
+        <p:txBody>
+          <a:bodyPr wrap="square" rtlCol="0" anchor="t">
+            <a:spAutoFit/>
+          </a:bodyPr>
+          <a:p>
+            <a:r>
+              <a:rPr lang="ru-RU" altLang="en-US" sz="2200" dirty="0" smtClean="0">
+                <a:solidFill>
+                  <a:schemeClr val="bg1"/>
+                </a:solidFill>
+                <a:effectLst/>
+                <a:latin typeface="quote-cjk-patch"/>
+                <a:sym typeface="+mn-ea"/>
+              </a:rPr>
+              <a:t>Оглавление</a:t>
+            </a:r>
+            <a:endParaRPr lang="ru-RU" altLang="en-US" sz="2200" dirty="0" smtClean="0">
+              <a:solidFill>
+                <a:schemeClr val="bg1"/>
+              </a:solidFill>
+              <a:effectLst/>
+              <a:latin typeface="quote-cjk-patch"/>
+              <a:sym typeface="+mn-ea"/>
+            </a:endParaRPr>
+          </a:p>
+        </p:txBody>
+      </p:sp>
     </p:spTree>
-    <p:extLst>
-      <p:ext uri="{BB962C8B-B14F-4D97-AF65-F5344CB8AC3E}">
-        <p14:creationId xmlns:p14="http://schemas.microsoft.com/office/powerpoint/2010/main" val="688145012"/>
-      </p:ext>
-    </p:extLst>
   </p:cSld>
   <p:clrMapOvr>
     <a:masterClrMapping/>
@@ -6219,7 +6623,7 @@
         </p:spPr>
         <p:txBody>
           <a:bodyPr>
-            <a:normAutofit/>
+            <a:normAutofit fontScale="90000"/>
           </a:bodyPr>
           <a:lstStyle/>
           <a:p>
@@ -6255,7 +6659,7 @@
           <p:nvPr/>
         </p:nvPicPr>
         <p:blipFill>
-          <a:blip r:embed="rId2"/>
+          <a:blip r:embed="rId1"/>
           <a:stretch>
             <a:fillRect/>
           </a:stretch>
@@ -6270,12 +6674,52 @@
           </a:prstGeom>
         </p:spPr>
       </p:pic>
+      <p:sp>
+        <p:nvSpPr>
+          <p:cNvPr id="5" name="Текстовое поле 4">
+            <a:hlinkClick r:id="rId2" action="ppaction://hlinksldjump"/>
+          </p:cNvPr>
+          <p:cNvSpPr txBox="1"/>
+          <p:nvPr/>
+        </p:nvSpPr>
+        <p:spPr>
+          <a:xfrm>
+            <a:off x="10215880" y="208280"/>
+            <a:ext cx="1758315" cy="429895"/>
+          </a:xfrm>
+          <a:prstGeom prst="rect">
+            <a:avLst/>
+          </a:prstGeom>
+          <a:noFill/>
+        </p:spPr>
+        <p:txBody>
+          <a:bodyPr wrap="square" rtlCol="0" anchor="t">
+            <a:spAutoFit/>
+          </a:bodyPr>
+          <a:p>
+            <a:r>
+              <a:rPr lang="ru-RU" altLang="en-US" sz="2200" dirty="0" smtClean="0">
+                <a:solidFill>
+                  <a:schemeClr val="bg1"/>
+                </a:solidFill>
+                <a:effectLst/>
+                <a:latin typeface="quote-cjk-patch"/>
+                <a:sym typeface="+mn-ea"/>
+              </a:rPr>
+              <a:t>Оглавление</a:t>
+            </a:r>
+            <a:endParaRPr lang="ru-RU" altLang="en-US" sz="2200" dirty="0" smtClean="0">
+              <a:solidFill>
+                <a:schemeClr val="bg1"/>
+              </a:solidFill>
+              <a:effectLst/>
+              <a:latin typeface="quote-cjk-patch"/>
+              <a:sym typeface="+mn-ea"/>
+            </a:endParaRPr>
+          </a:p>
+        </p:txBody>
+      </p:sp>
     </p:spTree>
-    <p:extLst>
-      <p:ext uri="{BB962C8B-B14F-4D97-AF65-F5344CB8AC3E}">
-        <p14:creationId xmlns:p14="http://schemas.microsoft.com/office/powerpoint/2010/main" val="3373216948"/>
-      </p:ext>
-    </p:extLst>
   </p:cSld>
   <p:clrMapOvr>
     <a:masterClrMapping/>
@@ -6341,7 +6785,7 @@
         </p:spPr>
         <p:txBody>
           <a:bodyPr>
-            <a:normAutofit/>
+            <a:normAutofit fontScale="90000"/>
           </a:bodyPr>
           <a:lstStyle/>
           <a:p>
@@ -6371,7 +6815,7 @@
           <p:nvPr/>
         </p:nvPicPr>
         <p:blipFill>
-          <a:blip r:embed="rId2">
+          <a:blip r:embed="rId1">
             <a:extLst>
               <a:ext uri="{28A0092B-C50C-407E-A947-70E740481C1C}">
                 <a14:useLocalDpi xmlns:a14="http://schemas.microsoft.com/office/drawing/2010/main" val="0"/>
@@ -6610,6 +7054,14 @@
               </a:rPr>
               <a:t>])</a:t>
             </a:r>
+            <a:endParaRPr lang="en-US" sz="1500" i="1" kern="0" dirty="0" smtClean="0">
+              <a:solidFill>
+                <a:srgbClr val="00FFFF"/>
+              </a:solidFill>
+              <a:latin typeface="Consolas" panose="020B0609020204030204" pitchFamily="49" charset="0"/>
+              <a:ea typeface="Times New Roman" panose="02020603050405020304" pitchFamily="18" charset="0"/>
+              <a:cs typeface="Times New Roman" panose="02020603050405020304" pitchFamily="18" charset="0"/>
+            </a:endParaRPr>
           </a:p>
           <a:p>
             <a:pPr>
@@ -6660,6 +7112,14 @@
               </a:rPr>
               <a:t>:</a:t>
             </a:r>
+            <a:endParaRPr lang="ru-RU" sz="2200" b="1" kern="100" dirty="0" smtClean="0">
+              <a:solidFill>
+                <a:schemeClr val="bg1"/>
+              </a:solidFill>
+              <a:latin typeface="+mj-lt"/>
+              <a:ea typeface="Calibri" panose="020F0502020204030204" pitchFamily="34" charset="0"/>
+              <a:cs typeface="Times New Roman" panose="02020603050405020304" pitchFamily="18" charset="0"/>
+            </a:endParaRPr>
           </a:p>
           <a:p>
             <a:pPr>
@@ -6820,12 +7280,52 @@
           </a:p>
         </p:txBody>
       </p:sp>
+      <p:sp>
+        <p:nvSpPr>
+          <p:cNvPr id="3" name="Текстовое поле 2">
+            <a:hlinkClick r:id="rId2" action="ppaction://hlinksldjump"/>
+          </p:cNvPr>
+          <p:cNvSpPr txBox="1"/>
+          <p:nvPr/>
+        </p:nvSpPr>
+        <p:spPr>
+          <a:xfrm>
+            <a:off x="10215880" y="208280"/>
+            <a:ext cx="1758315" cy="429895"/>
+          </a:xfrm>
+          <a:prstGeom prst="rect">
+            <a:avLst/>
+          </a:prstGeom>
+          <a:noFill/>
+        </p:spPr>
+        <p:txBody>
+          <a:bodyPr wrap="square" rtlCol="0" anchor="t">
+            <a:spAutoFit/>
+          </a:bodyPr>
+          <a:p>
+            <a:r>
+              <a:rPr lang="ru-RU" altLang="en-US" sz="2200" dirty="0" smtClean="0">
+                <a:solidFill>
+                  <a:schemeClr val="bg1"/>
+                </a:solidFill>
+                <a:effectLst/>
+                <a:latin typeface="quote-cjk-patch"/>
+                <a:sym typeface="+mn-ea"/>
+              </a:rPr>
+              <a:t>Оглавление</a:t>
+            </a:r>
+            <a:endParaRPr lang="ru-RU" altLang="en-US" sz="2200" dirty="0" smtClean="0">
+              <a:solidFill>
+                <a:schemeClr val="bg1"/>
+              </a:solidFill>
+              <a:effectLst/>
+              <a:latin typeface="quote-cjk-patch"/>
+              <a:sym typeface="+mn-ea"/>
+            </a:endParaRPr>
+          </a:p>
+        </p:txBody>
+      </p:sp>
     </p:spTree>
-    <p:extLst>
-      <p:ext uri="{BB962C8B-B14F-4D97-AF65-F5344CB8AC3E}">
-        <p14:creationId xmlns:p14="http://schemas.microsoft.com/office/powerpoint/2010/main" val="281320634"/>
-      </p:ext>
-    </p:extLst>
   </p:cSld>
   <p:clrMapOvr>
     <a:masterClrMapping/>
@@ -6912,11 +7412,6 @@
         </p:txBody>
       </p:sp>
     </p:spTree>
-    <p:extLst>
-      <p:ext uri="{BB962C8B-B14F-4D97-AF65-F5344CB8AC3E}">
-        <p14:creationId xmlns:p14="http://schemas.microsoft.com/office/powerpoint/2010/main" val="3054880813"/>
-      </p:ext>
-    </p:extLst>
   </p:cSld>
   <p:clrMapOvr>
     <a:masterClrMapping/>
@@ -6976,8 +7471,8 @@
         </p:nvSpPr>
         <p:spPr>
           <a:xfrm>
-            <a:off x="0" y="207963"/>
-            <a:ext cx="10792691" cy="884237"/>
+            <a:off x="0" y="208280"/>
+            <a:ext cx="11745595" cy="834390"/>
           </a:xfrm>
         </p:spPr>
         <p:txBody>
@@ -7003,12 +7498,869 @@
           </a:p>
         </p:txBody>
       </p:sp>
+      <p:sp>
+        <p:nvSpPr>
+          <p:cNvPr id="3" name="Текстовое поле 2">
+            <a:hlinkClick r:id="rId1" tooltip="" action="ppaction://hlinksldjump"/>
+          </p:cNvPr>
+          <p:cNvSpPr txBox="1"/>
+          <p:nvPr/>
+        </p:nvSpPr>
+        <p:spPr>
+          <a:xfrm>
+            <a:off x="149225" y="1337310"/>
+            <a:ext cx="3614420" cy="429895"/>
+          </a:xfrm>
+          <a:prstGeom prst="rect">
+            <a:avLst/>
+          </a:prstGeom>
+          <a:noFill/>
+        </p:spPr>
+        <p:txBody>
+          <a:bodyPr wrap="square" rtlCol="0" anchor="t">
+            <a:spAutoFit/>
+          </a:bodyPr>
+          <a:p>
+            <a:r>
+              <a:rPr lang="en-US" altLang="ru-RU" sz="2200" b="1" dirty="0" smtClean="0">
+                <a:solidFill>
+                  <a:schemeClr val="bg1"/>
+                </a:solidFill>
+                <a:effectLst/>
+                <a:latin typeface="Calibri" panose="020F0502020204030204" pitchFamily="34" charset="0"/>
+                <a:cs typeface="Calibri" panose="020F0502020204030204" pitchFamily="34" charset="0"/>
+                <a:sym typeface="+mn-ea"/>
+              </a:rPr>
+              <a:t>1</a:t>
+            </a:r>
+            <a:r>
+              <a:rPr lang="ru-RU" altLang="ru-RU" sz="2200" b="1" dirty="0" smtClean="0">
+                <a:solidFill>
+                  <a:schemeClr val="bg1"/>
+                </a:solidFill>
+                <a:effectLst/>
+                <a:latin typeface="Calibri" panose="020F0502020204030204" pitchFamily="34" charset="0"/>
+                <a:cs typeface="Calibri" panose="020F0502020204030204" pitchFamily="34" charset="0"/>
+                <a:sym typeface="+mn-ea"/>
+              </a:rPr>
+              <a:t>. Постановка задачи</a:t>
+            </a:r>
+            <a:endParaRPr lang="ru-RU" altLang="ru-RU" sz="2200" b="1" dirty="0" smtClean="0">
+              <a:solidFill>
+                <a:schemeClr val="bg1"/>
+              </a:solidFill>
+              <a:effectLst/>
+              <a:latin typeface="Calibri" panose="020F0502020204030204" pitchFamily="34" charset="0"/>
+              <a:cs typeface="Calibri" panose="020F0502020204030204" pitchFamily="34" charset="0"/>
+              <a:sym typeface="+mn-ea"/>
+            </a:endParaRPr>
+          </a:p>
+        </p:txBody>
+      </p:sp>
+      <p:sp>
+        <p:nvSpPr>
+          <p:cNvPr id="4" name="Текстовое поле 3">
+            <a:hlinkClick r:id="rId2" tooltip="" action="ppaction://hlinksldjump"/>
+          </p:cNvPr>
+          <p:cNvSpPr txBox="1"/>
+          <p:nvPr/>
+        </p:nvSpPr>
+        <p:spPr>
+          <a:xfrm>
+            <a:off x="149225" y="2061845"/>
+            <a:ext cx="4726305" cy="429895"/>
+          </a:xfrm>
+          <a:prstGeom prst="rect">
+            <a:avLst/>
+          </a:prstGeom>
+          <a:noFill/>
+        </p:spPr>
+        <p:txBody>
+          <a:bodyPr wrap="square" rtlCol="0" anchor="t">
+            <a:spAutoFit/>
+          </a:bodyPr>
+          <a:p>
+            <a:r>
+              <a:rPr lang="ru-RU" altLang="ru-RU" sz="2200" b="1" dirty="0" smtClean="0">
+                <a:solidFill>
+                  <a:schemeClr val="bg1"/>
+                </a:solidFill>
+                <a:effectLst/>
+                <a:latin typeface="Calibri" panose="020F0502020204030204" pitchFamily="34" charset="0"/>
+                <a:cs typeface="Calibri" panose="020F0502020204030204" pitchFamily="34" charset="0"/>
+                <a:sym typeface="+mn-ea"/>
+              </a:rPr>
+              <a:t>2. Функциональный анализ №1</a:t>
+            </a:r>
+            <a:endParaRPr lang="ru-RU" altLang="ru-RU" sz="2200" b="1" dirty="0" smtClean="0">
+              <a:solidFill>
+                <a:schemeClr val="bg1"/>
+              </a:solidFill>
+              <a:effectLst/>
+              <a:latin typeface="Calibri" panose="020F0502020204030204" pitchFamily="34" charset="0"/>
+              <a:cs typeface="Calibri" panose="020F0502020204030204" pitchFamily="34" charset="0"/>
+              <a:sym typeface="+mn-ea"/>
+            </a:endParaRPr>
+          </a:p>
+        </p:txBody>
+      </p:sp>
+      <p:sp>
+        <p:nvSpPr>
+          <p:cNvPr id="5" name="Текстовое поле 4">
+            <a:hlinkClick r:id="rId3" tooltip="" action="ppaction://hlinksldjump"/>
+          </p:cNvPr>
+          <p:cNvSpPr txBox="1"/>
+          <p:nvPr/>
+        </p:nvSpPr>
+        <p:spPr>
+          <a:xfrm>
+            <a:off x="149225" y="2786380"/>
+            <a:ext cx="4726305" cy="429895"/>
+          </a:xfrm>
+          <a:prstGeom prst="rect">
+            <a:avLst/>
+          </a:prstGeom>
+          <a:noFill/>
+        </p:spPr>
+        <p:txBody>
+          <a:bodyPr wrap="square" rtlCol="0" anchor="t">
+            <a:spAutoFit/>
+          </a:bodyPr>
+          <a:p>
+            <a:r>
+              <a:rPr lang="ru-RU" altLang="ru-RU" sz="2200" b="1" dirty="0" smtClean="0">
+                <a:solidFill>
+                  <a:schemeClr val="bg1"/>
+                </a:solidFill>
+                <a:effectLst/>
+                <a:latin typeface="Calibri" panose="020F0502020204030204" pitchFamily="34" charset="0"/>
+                <a:cs typeface="Calibri" panose="020F0502020204030204" pitchFamily="34" charset="0"/>
+                <a:sym typeface="+mn-ea"/>
+              </a:rPr>
+              <a:t>3. Функциональный анализ №2</a:t>
+            </a:r>
+            <a:endParaRPr lang="ru-RU" altLang="ru-RU" sz="2200" b="1" dirty="0" smtClean="0">
+              <a:solidFill>
+                <a:schemeClr val="bg1"/>
+              </a:solidFill>
+              <a:effectLst/>
+              <a:latin typeface="Calibri" panose="020F0502020204030204" pitchFamily="34" charset="0"/>
+              <a:cs typeface="Calibri" panose="020F0502020204030204" pitchFamily="34" charset="0"/>
+              <a:sym typeface="+mn-ea"/>
+            </a:endParaRPr>
+          </a:p>
+        </p:txBody>
+      </p:sp>
+      <p:sp>
+        <p:nvSpPr>
+          <p:cNvPr id="6" name="Текстовое поле 5">
+            <a:hlinkClick r:id="rId4" tooltip="" action="ppaction://hlinksldjump"/>
+          </p:cNvPr>
+          <p:cNvSpPr txBox="1"/>
+          <p:nvPr/>
+        </p:nvSpPr>
+        <p:spPr>
+          <a:xfrm>
+            <a:off x="149225" y="3510915"/>
+            <a:ext cx="4726305" cy="429895"/>
+          </a:xfrm>
+          <a:prstGeom prst="rect">
+            <a:avLst/>
+          </a:prstGeom>
+          <a:noFill/>
+        </p:spPr>
+        <p:txBody>
+          <a:bodyPr wrap="square" rtlCol="0" anchor="t">
+            <a:spAutoFit/>
+          </a:bodyPr>
+          <a:p>
+            <a:r>
+              <a:rPr lang="ru-RU" altLang="ru-RU" sz="2200" b="1" dirty="0" smtClean="0">
+                <a:solidFill>
+                  <a:schemeClr val="bg1"/>
+                </a:solidFill>
+                <a:effectLst/>
+                <a:latin typeface="Calibri" panose="020F0502020204030204" pitchFamily="34" charset="0"/>
+                <a:cs typeface="Calibri" panose="020F0502020204030204" pitchFamily="34" charset="0"/>
+                <a:sym typeface="+mn-ea"/>
+              </a:rPr>
+              <a:t>4. </a:t>
+            </a:r>
+            <a:r>
+              <a:rPr lang="en-US" altLang="ru-RU" sz="2200" b="1" dirty="0" smtClean="0">
+                <a:solidFill>
+                  <a:schemeClr val="bg1"/>
+                </a:solidFill>
+                <a:effectLst/>
+                <a:latin typeface="Calibri" panose="020F0502020204030204" pitchFamily="34" charset="0"/>
+                <a:cs typeface="Calibri" panose="020F0502020204030204" pitchFamily="34" charset="0"/>
+                <a:sym typeface="+mn-ea"/>
+              </a:rPr>
+              <a:t>UML</a:t>
+            </a:r>
+            <a:endParaRPr lang="en-US" altLang="ru-RU" sz="2200" b="1" dirty="0" smtClean="0">
+              <a:solidFill>
+                <a:schemeClr val="bg1"/>
+              </a:solidFill>
+              <a:effectLst/>
+              <a:latin typeface="Calibri" panose="020F0502020204030204" pitchFamily="34" charset="0"/>
+              <a:cs typeface="Calibri" panose="020F0502020204030204" pitchFamily="34" charset="0"/>
+              <a:sym typeface="+mn-ea"/>
+            </a:endParaRPr>
+          </a:p>
+        </p:txBody>
+      </p:sp>
+      <p:sp>
+        <p:nvSpPr>
+          <p:cNvPr id="7" name="Текстовое поле 6">
+            <a:hlinkClick r:id="rId5" tooltip="" action="ppaction://hlinksldjump"/>
+          </p:cNvPr>
+          <p:cNvSpPr txBox="1"/>
+          <p:nvPr/>
+        </p:nvSpPr>
+        <p:spPr>
+          <a:xfrm>
+            <a:off x="149225" y="4235450"/>
+            <a:ext cx="4726305" cy="429895"/>
+          </a:xfrm>
+          <a:prstGeom prst="rect">
+            <a:avLst/>
+          </a:prstGeom>
+          <a:noFill/>
+        </p:spPr>
+        <p:txBody>
+          <a:bodyPr wrap="square" rtlCol="0" anchor="t">
+            <a:spAutoFit/>
+          </a:bodyPr>
+          <a:p>
+            <a:r>
+              <a:rPr lang="en-US" altLang="ru-RU" sz="2200" b="1" dirty="0" smtClean="0">
+                <a:solidFill>
+                  <a:schemeClr val="bg1"/>
+                </a:solidFill>
+                <a:effectLst/>
+                <a:latin typeface="Calibri" panose="020F0502020204030204" pitchFamily="34" charset="0"/>
+                <a:cs typeface="Calibri" panose="020F0502020204030204" pitchFamily="34" charset="0"/>
+                <a:sym typeface="+mn-ea"/>
+              </a:rPr>
+              <a:t>5</a:t>
+            </a:r>
+            <a:r>
+              <a:rPr lang="ru-RU" altLang="ru-RU" sz="2200" b="1" dirty="0" smtClean="0">
+                <a:solidFill>
+                  <a:schemeClr val="bg1"/>
+                </a:solidFill>
+                <a:effectLst/>
+                <a:latin typeface="Calibri" panose="020F0502020204030204" pitchFamily="34" charset="0"/>
+                <a:cs typeface="Calibri" panose="020F0502020204030204" pitchFamily="34" charset="0"/>
+                <a:sym typeface="+mn-ea"/>
+              </a:rPr>
+              <a:t>.</a:t>
+            </a:r>
+            <a:r>
+              <a:rPr lang="en-US" altLang="ru-RU" sz="2200" b="1" dirty="0" smtClean="0">
+                <a:solidFill>
+                  <a:schemeClr val="bg1"/>
+                </a:solidFill>
+                <a:effectLst/>
+                <a:latin typeface="Calibri" panose="020F0502020204030204" pitchFamily="34" charset="0"/>
+                <a:cs typeface="Calibri" panose="020F0502020204030204" pitchFamily="34" charset="0"/>
+                <a:sym typeface="+mn-ea"/>
+              </a:rPr>
+              <a:t> ER-</a:t>
+            </a:r>
+            <a:r>
+              <a:rPr lang="ru-RU" altLang="ru-RU" sz="2200" b="1" dirty="0" smtClean="0">
+                <a:solidFill>
+                  <a:schemeClr val="bg1"/>
+                </a:solidFill>
+                <a:effectLst/>
+                <a:latin typeface="Calibri" panose="020F0502020204030204" pitchFamily="34" charset="0"/>
+                <a:cs typeface="Calibri" panose="020F0502020204030204" pitchFamily="34" charset="0"/>
+                <a:sym typeface="+mn-ea"/>
+              </a:rPr>
+              <a:t>модель БД</a:t>
+            </a:r>
+            <a:endParaRPr lang="en-US" altLang="ru-RU" sz="2200" b="1" dirty="0" smtClean="0">
+              <a:solidFill>
+                <a:schemeClr val="bg1"/>
+              </a:solidFill>
+              <a:effectLst/>
+              <a:latin typeface="Calibri" panose="020F0502020204030204" pitchFamily="34" charset="0"/>
+              <a:cs typeface="Calibri" panose="020F0502020204030204" pitchFamily="34" charset="0"/>
+              <a:sym typeface="+mn-ea"/>
+            </a:endParaRPr>
+          </a:p>
+        </p:txBody>
+      </p:sp>
+      <p:sp>
+        <p:nvSpPr>
+          <p:cNvPr id="8" name="Текстовое поле 7">
+            <a:hlinkClick r:id="rId6" tooltip="" action="ppaction://hlinksldjump"/>
+          </p:cNvPr>
+          <p:cNvSpPr txBox="1"/>
+          <p:nvPr/>
+        </p:nvSpPr>
+        <p:spPr>
+          <a:xfrm>
+            <a:off x="149225" y="4959985"/>
+            <a:ext cx="4726305" cy="429895"/>
+          </a:xfrm>
+          <a:prstGeom prst="rect">
+            <a:avLst/>
+          </a:prstGeom>
+          <a:noFill/>
+        </p:spPr>
+        <p:txBody>
+          <a:bodyPr wrap="square" rtlCol="0" anchor="t">
+            <a:spAutoFit/>
+          </a:bodyPr>
+          <a:p>
+            <a:r>
+              <a:rPr lang="ru-RU" altLang="ru-RU" sz="2200" b="1" dirty="0" smtClean="0">
+                <a:solidFill>
+                  <a:schemeClr val="bg1"/>
+                </a:solidFill>
+                <a:effectLst/>
+                <a:latin typeface="Calibri" panose="020F0502020204030204" pitchFamily="34" charset="0"/>
+                <a:cs typeface="Calibri" panose="020F0502020204030204" pitchFamily="34" charset="0"/>
+                <a:sym typeface="+mn-ea"/>
+              </a:rPr>
+              <a:t>6.</a:t>
+            </a:r>
+            <a:r>
+              <a:rPr lang="en-US" altLang="ru-RU" sz="2200" b="1" dirty="0" smtClean="0">
+                <a:solidFill>
+                  <a:schemeClr val="bg1"/>
+                </a:solidFill>
+                <a:effectLst/>
+                <a:latin typeface="Calibri" panose="020F0502020204030204" pitchFamily="34" charset="0"/>
+                <a:cs typeface="Calibri" panose="020F0502020204030204" pitchFamily="34" charset="0"/>
+                <a:sym typeface="+mn-ea"/>
+              </a:rPr>
+              <a:t> </a:t>
+            </a:r>
+            <a:r>
+              <a:rPr lang="ru-RU" altLang="en-US" sz="2200" b="1" dirty="0" smtClean="0">
+                <a:solidFill>
+                  <a:schemeClr val="bg1"/>
+                </a:solidFill>
+                <a:effectLst/>
+                <a:latin typeface="Calibri" panose="020F0502020204030204" pitchFamily="34" charset="0"/>
+                <a:cs typeface="Calibri" panose="020F0502020204030204" pitchFamily="34" charset="0"/>
+                <a:sym typeface="+mn-ea"/>
+              </a:rPr>
+              <a:t>Примеры запросов</a:t>
+            </a:r>
+            <a:endParaRPr lang="ru-RU" altLang="en-US" sz="2200" b="1" dirty="0" smtClean="0">
+              <a:solidFill>
+                <a:schemeClr val="bg1"/>
+              </a:solidFill>
+              <a:effectLst/>
+              <a:latin typeface="Calibri" panose="020F0502020204030204" pitchFamily="34" charset="0"/>
+              <a:cs typeface="Calibri" panose="020F0502020204030204" pitchFamily="34" charset="0"/>
+              <a:sym typeface="+mn-ea"/>
+            </a:endParaRPr>
+          </a:p>
+        </p:txBody>
+      </p:sp>
+      <p:sp>
+        <p:nvSpPr>
+          <p:cNvPr id="9" name="Текстовое поле 8">
+            <a:hlinkClick r:id="rId7" tooltip="" action="ppaction://hlinksldjump"/>
+          </p:cNvPr>
+          <p:cNvSpPr txBox="1"/>
+          <p:nvPr/>
+        </p:nvSpPr>
+        <p:spPr>
+          <a:xfrm>
+            <a:off x="149225" y="5586095"/>
+            <a:ext cx="4726305" cy="429895"/>
+          </a:xfrm>
+          <a:prstGeom prst="rect">
+            <a:avLst/>
+          </a:prstGeom>
+          <a:noFill/>
+        </p:spPr>
+        <p:txBody>
+          <a:bodyPr wrap="square" rtlCol="0" anchor="t">
+            <a:spAutoFit/>
+          </a:bodyPr>
+          <a:p>
+            <a:r>
+              <a:rPr lang="ru-RU" altLang="ru-RU" sz="2200" b="1" dirty="0" smtClean="0">
+                <a:solidFill>
+                  <a:schemeClr val="bg1"/>
+                </a:solidFill>
+                <a:effectLst/>
+                <a:latin typeface="Calibri" panose="020F0502020204030204" pitchFamily="34" charset="0"/>
+                <a:cs typeface="Calibri" panose="020F0502020204030204" pitchFamily="34" charset="0"/>
+                <a:sym typeface="+mn-ea"/>
+              </a:rPr>
+              <a:t>7.</a:t>
+            </a:r>
+            <a:r>
+              <a:rPr lang="en-US" altLang="ru-RU" sz="2200" b="1" dirty="0" smtClean="0">
+                <a:solidFill>
+                  <a:schemeClr val="bg1"/>
+                </a:solidFill>
+                <a:effectLst/>
+                <a:latin typeface="Calibri" panose="020F0502020204030204" pitchFamily="34" charset="0"/>
+                <a:cs typeface="Calibri" panose="020F0502020204030204" pitchFamily="34" charset="0"/>
+                <a:sym typeface="+mn-ea"/>
+              </a:rPr>
+              <a:t> </a:t>
+            </a:r>
+            <a:r>
+              <a:rPr lang="ru-RU" altLang="en-US" sz="2200" b="1" dirty="0" smtClean="0">
+                <a:solidFill>
+                  <a:schemeClr val="bg1"/>
+                </a:solidFill>
+                <a:effectLst/>
+                <a:latin typeface="Calibri" panose="020F0502020204030204" pitchFamily="34" charset="0"/>
+                <a:cs typeface="Calibri" panose="020F0502020204030204" pitchFamily="34" charset="0"/>
+                <a:sym typeface="+mn-ea"/>
+              </a:rPr>
+              <a:t>Хранимые процедуры, функции</a:t>
+            </a:r>
+            <a:endParaRPr lang="ru-RU" altLang="en-US" sz="2200" b="1" dirty="0" smtClean="0">
+              <a:solidFill>
+                <a:schemeClr val="bg1"/>
+              </a:solidFill>
+              <a:effectLst/>
+              <a:latin typeface="Calibri" panose="020F0502020204030204" pitchFamily="34" charset="0"/>
+              <a:cs typeface="Calibri" panose="020F0502020204030204" pitchFamily="34" charset="0"/>
+              <a:sym typeface="+mn-ea"/>
+            </a:endParaRPr>
+          </a:p>
+        </p:txBody>
+      </p:sp>
+      <p:sp>
+        <p:nvSpPr>
+          <p:cNvPr id="10" name="Текстовое поле 9">
+            <a:hlinkClick r:id="rId8" tooltip="" action="ppaction://hlinksldjump"/>
+          </p:cNvPr>
+          <p:cNvSpPr txBox="1"/>
+          <p:nvPr/>
+        </p:nvSpPr>
+        <p:spPr>
+          <a:xfrm>
+            <a:off x="149225" y="6212205"/>
+            <a:ext cx="4726305" cy="429895"/>
+          </a:xfrm>
+          <a:prstGeom prst="rect">
+            <a:avLst/>
+          </a:prstGeom>
+          <a:noFill/>
+        </p:spPr>
+        <p:txBody>
+          <a:bodyPr wrap="square" rtlCol="0" anchor="t">
+            <a:spAutoFit/>
+          </a:bodyPr>
+          <a:p>
+            <a:r>
+              <a:rPr lang="ru-RU" altLang="ru-RU" sz="2200" b="1" dirty="0" smtClean="0">
+                <a:solidFill>
+                  <a:schemeClr val="bg1"/>
+                </a:solidFill>
+                <a:effectLst/>
+                <a:latin typeface="Calibri" panose="020F0502020204030204" pitchFamily="34" charset="0"/>
+                <a:cs typeface="Calibri" panose="020F0502020204030204" pitchFamily="34" charset="0"/>
+                <a:sym typeface="+mn-ea"/>
+              </a:rPr>
+              <a:t>8.</a:t>
+            </a:r>
+            <a:r>
+              <a:rPr lang="en-US" altLang="ru-RU" sz="2200" b="1" dirty="0" smtClean="0">
+                <a:solidFill>
+                  <a:schemeClr val="bg1"/>
+                </a:solidFill>
+                <a:effectLst/>
+                <a:latin typeface="Calibri" panose="020F0502020204030204" pitchFamily="34" charset="0"/>
+                <a:cs typeface="Calibri" panose="020F0502020204030204" pitchFamily="34" charset="0"/>
+                <a:sym typeface="+mn-ea"/>
+              </a:rPr>
+              <a:t> </a:t>
+            </a:r>
+            <a:r>
+              <a:rPr lang="ru-RU" altLang="en-US" sz="2200" b="1" dirty="0" smtClean="0">
+                <a:solidFill>
+                  <a:schemeClr val="bg1"/>
+                </a:solidFill>
+                <a:effectLst/>
+                <a:latin typeface="Calibri" panose="020F0502020204030204" pitchFamily="34" charset="0"/>
+                <a:cs typeface="Calibri" panose="020F0502020204030204" pitchFamily="34" charset="0"/>
+                <a:sym typeface="+mn-ea"/>
+              </a:rPr>
+              <a:t>Триггеры</a:t>
+            </a:r>
+            <a:endParaRPr lang="ru-RU" altLang="en-US" sz="2200" b="1" dirty="0" smtClean="0">
+              <a:solidFill>
+                <a:schemeClr val="bg1"/>
+              </a:solidFill>
+              <a:effectLst/>
+              <a:latin typeface="Calibri" panose="020F0502020204030204" pitchFamily="34" charset="0"/>
+              <a:cs typeface="Calibri" panose="020F0502020204030204" pitchFamily="34" charset="0"/>
+              <a:sym typeface="+mn-ea"/>
+            </a:endParaRPr>
+          </a:p>
+        </p:txBody>
+      </p:sp>
+      <p:sp>
+        <p:nvSpPr>
+          <p:cNvPr id="11" name="Текстовое поле 10">
+            <a:hlinkClick r:id="rId9" tooltip="" action="ppaction://hlinksldjump"/>
+          </p:cNvPr>
+          <p:cNvSpPr txBox="1"/>
+          <p:nvPr/>
+        </p:nvSpPr>
+        <p:spPr>
+          <a:xfrm>
+            <a:off x="5786755" y="1337310"/>
+            <a:ext cx="4726305" cy="429895"/>
+          </a:xfrm>
+          <a:prstGeom prst="rect">
+            <a:avLst/>
+          </a:prstGeom>
+          <a:noFill/>
+        </p:spPr>
+        <p:txBody>
+          <a:bodyPr wrap="square" rtlCol="0" anchor="t">
+            <a:spAutoFit/>
+          </a:bodyPr>
+          <a:p>
+            <a:r>
+              <a:rPr lang="ru-RU" altLang="ru-RU" sz="2200" b="1" dirty="0" smtClean="0">
+                <a:solidFill>
+                  <a:schemeClr val="bg1"/>
+                </a:solidFill>
+                <a:effectLst/>
+                <a:latin typeface="Calibri" panose="020F0502020204030204" pitchFamily="34" charset="0"/>
+                <a:cs typeface="Calibri" panose="020F0502020204030204" pitchFamily="34" charset="0"/>
+                <a:sym typeface="+mn-ea"/>
+              </a:rPr>
+              <a:t>9.</a:t>
+            </a:r>
+            <a:r>
+              <a:rPr lang="en-US" altLang="ru-RU" sz="2200" b="1" dirty="0" smtClean="0">
+                <a:solidFill>
+                  <a:schemeClr val="bg1"/>
+                </a:solidFill>
+                <a:effectLst/>
+                <a:latin typeface="Calibri" panose="020F0502020204030204" pitchFamily="34" charset="0"/>
+                <a:cs typeface="Calibri" panose="020F0502020204030204" pitchFamily="34" charset="0"/>
+                <a:sym typeface="+mn-ea"/>
+              </a:rPr>
+              <a:t> </a:t>
+            </a:r>
+            <a:r>
+              <a:rPr lang="ru-RU" altLang="en-US" sz="2200" b="1" dirty="0" smtClean="0">
+                <a:solidFill>
+                  <a:schemeClr val="bg1"/>
+                </a:solidFill>
+                <a:effectLst/>
+                <a:latin typeface="Calibri" panose="020F0502020204030204" pitchFamily="34" charset="0"/>
+                <a:cs typeface="Calibri" panose="020F0502020204030204" pitchFamily="34" charset="0"/>
+                <a:sym typeface="+mn-ea"/>
+              </a:rPr>
+              <a:t>Пользователи и исключения</a:t>
+            </a:r>
+            <a:endParaRPr lang="ru-RU" altLang="en-US" sz="2200" b="1" dirty="0" smtClean="0">
+              <a:solidFill>
+                <a:schemeClr val="bg1"/>
+              </a:solidFill>
+              <a:effectLst/>
+              <a:latin typeface="Calibri" panose="020F0502020204030204" pitchFamily="34" charset="0"/>
+              <a:cs typeface="Calibri" panose="020F0502020204030204" pitchFamily="34" charset="0"/>
+              <a:sym typeface="+mn-ea"/>
+            </a:endParaRPr>
+          </a:p>
+        </p:txBody>
+      </p:sp>
+      <p:sp>
+        <p:nvSpPr>
+          <p:cNvPr id="12" name="Текстовое поле 11">
+            <a:hlinkClick r:id="rId10" tooltip="" action="ppaction://hlinksldjump"/>
+          </p:cNvPr>
+          <p:cNvSpPr txBox="1"/>
+          <p:nvPr/>
+        </p:nvSpPr>
+        <p:spPr>
+          <a:xfrm>
+            <a:off x="5786755" y="2061845"/>
+            <a:ext cx="4726305" cy="429895"/>
+          </a:xfrm>
+          <a:prstGeom prst="rect">
+            <a:avLst/>
+          </a:prstGeom>
+          <a:noFill/>
+        </p:spPr>
+        <p:txBody>
+          <a:bodyPr wrap="square" rtlCol="0" anchor="t">
+            <a:spAutoFit/>
+          </a:bodyPr>
+          <a:p>
+            <a:r>
+              <a:rPr lang="ru-RU" altLang="ru-RU" sz="2200" b="1" dirty="0" smtClean="0">
+                <a:solidFill>
+                  <a:schemeClr val="bg1"/>
+                </a:solidFill>
+                <a:effectLst/>
+                <a:latin typeface="Calibri" panose="020F0502020204030204" pitchFamily="34" charset="0"/>
+                <a:cs typeface="Calibri" panose="020F0502020204030204" pitchFamily="34" charset="0"/>
+                <a:sym typeface="+mn-ea"/>
+              </a:rPr>
+              <a:t>10.</a:t>
+            </a:r>
+            <a:r>
+              <a:rPr lang="en-US" altLang="ru-RU" sz="2200" b="1" dirty="0" smtClean="0">
+                <a:solidFill>
+                  <a:schemeClr val="bg1"/>
+                </a:solidFill>
+                <a:effectLst/>
+                <a:latin typeface="Calibri" panose="020F0502020204030204" pitchFamily="34" charset="0"/>
+                <a:cs typeface="Calibri" panose="020F0502020204030204" pitchFamily="34" charset="0"/>
+                <a:sym typeface="+mn-ea"/>
+              </a:rPr>
+              <a:t> </a:t>
+            </a:r>
+            <a:r>
+              <a:rPr lang="ru-RU" altLang="en-US" sz="2200" b="1" dirty="0" smtClean="0">
+                <a:solidFill>
+                  <a:schemeClr val="bg1"/>
+                </a:solidFill>
+                <a:effectLst/>
+                <a:latin typeface="Calibri" panose="020F0502020204030204" pitchFamily="34" charset="0"/>
+                <a:cs typeface="Calibri" panose="020F0502020204030204" pitchFamily="34" charset="0"/>
+                <a:sym typeface="+mn-ea"/>
+              </a:rPr>
+              <a:t>Графовая БД</a:t>
+            </a:r>
+            <a:endParaRPr lang="ru-RU" altLang="en-US" sz="2200" b="1" dirty="0" smtClean="0">
+              <a:solidFill>
+                <a:schemeClr val="bg1"/>
+              </a:solidFill>
+              <a:effectLst/>
+              <a:latin typeface="Calibri" panose="020F0502020204030204" pitchFamily="34" charset="0"/>
+              <a:cs typeface="Calibri" panose="020F0502020204030204" pitchFamily="34" charset="0"/>
+              <a:sym typeface="+mn-ea"/>
+            </a:endParaRPr>
+          </a:p>
+        </p:txBody>
+      </p:sp>
+      <p:sp>
+        <p:nvSpPr>
+          <p:cNvPr id="13" name="Текстовое поле 12">
+            <a:hlinkClick r:id="rId11" tooltip="" action="ppaction://hlinksldjump"/>
+          </p:cNvPr>
+          <p:cNvSpPr txBox="1"/>
+          <p:nvPr/>
+        </p:nvSpPr>
+        <p:spPr>
+          <a:xfrm>
+            <a:off x="5786755" y="2786380"/>
+            <a:ext cx="4726305" cy="429895"/>
+          </a:xfrm>
+          <a:prstGeom prst="rect">
+            <a:avLst/>
+          </a:prstGeom>
+          <a:noFill/>
+        </p:spPr>
+        <p:txBody>
+          <a:bodyPr wrap="square" rtlCol="0" anchor="t">
+            <a:spAutoFit/>
+          </a:bodyPr>
+          <a:p>
+            <a:r>
+              <a:rPr lang="ru-RU" altLang="ru-RU" sz="2200" b="1" dirty="0" smtClean="0">
+                <a:solidFill>
+                  <a:schemeClr val="bg1"/>
+                </a:solidFill>
+                <a:effectLst/>
+                <a:latin typeface="Calibri" panose="020F0502020204030204" pitchFamily="34" charset="0"/>
+                <a:cs typeface="Calibri" panose="020F0502020204030204" pitchFamily="34" charset="0"/>
+                <a:sym typeface="+mn-ea"/>
+              </a:rPr>
+              <a:t>11.</a:t>
+            </a:r>
+            <a:r>
+              <a:rPr lang="en-US" altLang="ru-RU" sz="2200" b="1" dirty="0" smtClean="0">
+                <a:solidFill>
+                  <a:schemeClr val="bg1"/>
+                </a:solidFill>
+                <a:effectLst/>
+                <a:latin typeface="Calibri" panose="020F0502020204030204" pitchFamily="34" charset="0"/>
+                <a:cs typeface="Calibri" panose="020F0502020204030204" pitchFamily="34" charset="0"/>
+                <a:sym typeface="+mn-ea"/>
+              </a:rPr>
+              <a:t> </a:t>
+            </a:r>
+            <a:r>
+              <a:rPr lang="ru-RU" altLang="en-US" sz="2200" b="1" dirty="0" smtClean="0">
+                <a:solidFill>
+                  <a:schemeClr val="bg1"/>
+                </a:solidFill>
+                <a:effectLst/>
+                <a:latin typeface="Calibri" panose="020F0502020204030204" pitchFamily="34" charset="0"/>
+                <a:cs typeface="Calibri" panose="020F0502020204030204" pitchFamily="34" charset="0"/>
+                <a:sym typeface="+mn-ea"/>
+              </a:rPr>
+              <a:t>Запросы к данным</a:t>
+            </a:r>
+            <a:endParaRPr lang="ru-RU" altLang="en-US" sz="2200" b="1" dirty="0" smtClean="0">
+              <a:solidFill>
+                <a:schemeClr val="bg1"/>
+              </a:solidFill>
+              <a:effectLst/>
+              <a:latin typeface="Calibri" panose="020F0502020204030204" pitchFamily="34" charset="0"/>
+              <a:cs typeface="Calibri" panose="020F0502020204030204" pitchFamily="34" charset="0"/>
+              <a:sym typeface="+mn-ea"/>
+            </a:endParaRPr>
+          </a:p>
+        </p:txBody>
+      </p:sp>
+      <p:sp>
+        <p:nvSpPr>
+          <p:cNvPr id="14" name="Текстовое поле 13">
+            <a:hlinkClick r:id="rId12" tooltip="" action="ppaction://hlinksldjump"/>
+          </p:cNvPr>
+          <p:cNvSpPr txBox="1"/>
+          <p:nvPr/>
+        </p:nvSpPr>
+        <p:spPr>
+          <a:xfrm>
+            <a:off x="5786755" y="3510915"/>
+            <a:ext cx="4726305" cy="429895"/>
+          </a:xfrm>
+          <a:prstGeom prst="rect">
+            <a:avLst/>
+          </a:prstGeom>
+          <a:noFill/>
+        </p:spPr>
+        <p:txBody>
+          <a:bodyPr wrap="square" rtlCol="0" anchor="t">
+            <a:spAutoFit/>
+          </a:bodyPr>
+          <a:p>
+            <a:r>
+              <a:rPr lang="ru-RU" altLang="ru-RU" sz="2200" b="1" dirty="0" smtClean="0">
+                <a:solidFill>
+                  <a:schemeClr val="bg1"/>
+                </a:solidFill>
+                <a:effectLst/>
+                <a:latin typeface="Calibri" panose="020F0502020204030204" pitchFamily="34" charset="0"/>
+                <a:cs typeface="Calibri" panose="020F0502020204030204" pitchFamily="34" charset="0"/>
+                <a:sym typeface="+mn-ea"/>
+              </a:rPr>
+              <a:t>12. Создание визуализаций</a:t>
+            </a:r>
+            <a:endParaRPr lang="ru-RU" altLang="en-US" sz="2200" b="1" dirty="0" smtClean="0">
+              <a:solidFill>
+                <a:schemeClr val="bg1"/>
+              </a:solidFill>
+              <a:effectLst/>
+              <a:latin typeface="Calibri" panose="020F0502020204030204" pitchFamily="34" charset="0"/>
+              <a:cs typeface="Calibri" panose="020F0502020204030204" pitchFamily="34" charset="0"/>
+              <a:sym typeface="+mn-ea"/>
+            </a:endParaRPr>
+          </a:p>
+        </p:txBody>
+      </p:sp>
+      <p:sp>
+        <p:nvSpPr>
+          <p:cNvPr id="15" name="Текстовое поле 14">
+            <a:hlinkClick r:id="rId13" tooltip="" action="ppaction://hlinksldjump"/>
+          </p:cNvPr>
+          <p:cNvSpPr txBox="1"/>
+          <p:nvPr/>
+        </p:nvSpPr>
+        <p:spPr>
+          <a:xfrm>
+            <a:off x="5786755" y="4235450"/>
+            <a:ext cx="4726305" cy="429895"/>
+          </a:xfrm>
+          <a:prstGeom prst="rect">
+            <a:avLst/>
+          </a:prstGeom>
+          <a:noFill/>
+        </p:spPr>
+        <p:txBody>
+          <a:bodyPr wrap="square" rtlCol="0" anchor="t">
+            <a:spAutoFit/>
+          </a:bodyPr>
+          <a:p>
+            <a:r>
+              <a:rPr lang="ru-RU" altLang="ru-RU" sz="2200" b="1" dirty="0" smtClean="0">
+                <a:solidFill>
+                  <a:schemeClr val="bg1"/>
+                </a:solidFill>
+                <a:effectLst/>
+                <a:latin typeface="Calibri" panose="020F0502020204030204" pitchFamily="34" charset="0"/>
+                <a:cs typeface="Calibri" panose="020F0502020204030204" pitchFamily="34" charset="0"/>
+                <a:sym typeface="+mn-ea"/>
+              </a:rPr>
+              <a:t>13. Дашборд</a:t>
+            </a:r>
+            <a:endParaRPr lang="ru-RU" altLang="en-US" sz="2200" b="1" dirty="0" smtClean="0">
+              <a:solidFill>
+                <a:schemeClr val="bg1"/>
+              </a:solidFill>
+              <a:effectLst/>
+              <a:latin typeface="Calibri" panose="020F0502020204030204" pitchFamily="34" charset="0"/>
+              <a:cs typeface="Calibri" panose="020F0502020204030204" pitchFamily="34" charset="0"/>
+              <a:sym typeface="+mn-ea"/>
+            </a:endParaRPr>
+          </a:p>
+        </p:txBody>
+      </p:sp>
+      <p:sp>
+        <p:nvSpPr>
+          <p:cNvPr id="16" name="Текстовое поле 15">
+            <a:hlinkClick r:id="rId14" tooltip="" action="ppaction://hlinksldjump"/>
+          </p:cNvPr>
+          <p:cNvSpPr txBox="1"/>
+          <p:nvPr/>
+        </p:nvSpPr>
+        <p:spPr>
+          <a:xfrm>
+            <a:off x="5786755" y="4959985"/>
+            <a:ext cx="4726305" cy="429895"/>
+          </a:xfrm>
+          <a:prstGeom prst="rect">
+            <a:avLst/>
+          </a:prstGeom>
+          <a:noFill/>
+        </p:spPr>
+        <p:txBody>
+          <a:bodyPr wrap="square" rtlCol="0" anchor="t">
+            <a:spAutoFit/>
+          </a:bodyPr>
+          <a:p>
+            <a:r>
+              <a:rPr lang="ru-RU" altLang="ru-RU" sz="2200" b="1" dirty="0" smtClean="0">
+                <a:solidFill>
+                  <a:schemeClr val="bg1"/>
+                </a:solidFill>
+                <a:effectLst/>
+                <a:latin typeface="Calibri" panose="020F0502020204030204" pitchFamily="34" charset="0"/>
+                <a:cs typeface="Calibri" panose="020F0502020204030204" pitchFamily="34" charset="0"/>
+                <a:sym typeface="+mn-ea"/>
+              </a:rPr>
+              <a:t>14. Параметры и расчеты</a:t>
+            </a:r>
+            <a:endParaRPr lang="ru-RU" altLang="en-US" sz="2200" b="1" dirty="0" smtClean="0">
+              <a:solidFill>
+                <a:schemeClr val="bg1"/>
+              </a:solidFill>
+              <a:effectLst/>
+              <a:latin typeface="Calibri" panose="020F0502020204030204" pitchFamily="34" charset="0"/>
+              <a:cs typeface="Calibri" panose="020F0502020204030204" pitchFamily="34" charset="0"/>
+              <a:sym typeface="+mn-ea"/>
+            </a:endParaRPr>
+          </a:p>
+        </p:txBody>
+      </p:sp>
     </p:spTree>
-    <p:extLst>
-      <p:ext uri="{BB962C8B-B14F-4D97-AF65-F5344CB8AC3E}">
-        <p14:creationId xmlns:p14="http://schemas.microsoft.com/office/powerpoint/2010/main" val="4036395586"/>
-      </p:ext>
-    </p:extLst>
   </p:cSld>
   <p:clrMapOvr>
     <a:masterClrMapping/>
@@ -7104,7 +8456,7 @@
         <p:spPr>
           <a:xfrm>
             <a:off x="254000" y="1092200"/>
-            <a:ext cx="6096000" cy="4832092"/>
+            <a:ext cx="6096000" cy="4831080"/>
           </a:xfrm>
           <a:prstGeom prst="rect">
             <a:avLst/>
@@ -7122,137 +8474,419 @@
                   <a:schemeClr val="bg1"/>
                 </a:solidFill>
                 <a:effectLst/>
-                <a:latin typeface="quote-cjk-patch"/>
+                <a:latin typeface="Calibri" panose="020F0502020204030204" pitchFamily="34" charset="0"/>
+                <a:cs typeface="Calibri" panose="020F0502020204030204" pitchFamily="34" charset="0"/>
               </a:rPr>
               <a:t>Проблема:</a:t>
             </a:r>
-            <a:r>
+            <a:br>
               <a:rPr lang="ru-RU" sz="2200" b="0" i="0" dirty="0" smtClean="0">
+                <a:solidFill>
+                  <a:schemeClr val="bg1"/>
+                </a:solidFill>
+                <a:effectLst/>
+                <a:latin typeface="Calibri" panose="020F0502020204030204" pitchFamily="34" charset="0"/>
+                <a:cs typeface="Calibri" panose="020F0502020204030204" pitchFamily="34" charset="0"/>
+              </a:rPr>
+            </a:br>
+            <a:r>
+              <a:rPr lang="ru-RU" sz="2200" b="0" i="0" dirty="0" smtClean="0">
+                <a:solidFill>
+                  <a:schemeClr val="bg1"/>
+                </a:solidFill>
+                <a:effectLst/>
+                <a:latin typeface="Calibri" panose="020F0502020204030204" pitchFamily="34" charset="0"/>
+                <a:cs typeface="Calibri" panose="020F0502020204030204" pitchFamily="34" charset="0"/>
+              </a:rPr>
+              <a:t>Ручной сбор данных о выборе научных направлений → ошибки, потери данных, сложность контроля лимитов, высокая трудоемкость группировки и проверки.</a:t>
+            </a:r>
+            <a:endParaRPr lang="ru-RU" sz="2200" b="0" i="0" dirty="0" smtClean="0">
+              <a:solidFill>
+                <a:schemeClr val="bg1"/>
+              </a:solidFill>
+              <a:effectLst/>
+              <a:latin typeface="Calibri" panose="020F0502020204030204" pitchFamily="34" charset="0"/>
+              <a:cs typeface="Calibri" panose="020F0502020204030204" pitchFamily="34" charset="0"/>
+            </a:endParaRPr>
+          </a:p>
+          <a:p>
+            <a:r>
+              <a:rPr lang="ru-RU" sz="2200" b="1" i="0" dirty="0" smtClean="0">
+                <a:solidFill>
+                  <a:schemeClr val="bg1"/>
+                </a:solidFill>
+                <a:effectLst/>
+                <a:latin typeface="Calibri" panose="020F0502020204030204" pitchFamily="34" charset="0"/>
+                <a:cs typeface="Calibri" panose="020F0502020204030204" pitchFamily="34" charset="0"/>
+              </a:rPr>
+              <a:t>Цель:</a:t>
+            </a:r>
+            <a:br>
+              <a:rPr lang="ru-RU" sz="2200" b="0" i="0" dirty="0" smtClean="0">
+                <a:solidFill>
+                  <a:schemeClr val="bg1"/>
+                </a:solidFill>
+                <a:effectLst/>
+                <a:latin typeface="Calibri" panose="020F0502020204030204" pitchFamily="34" charset="0"/>
+                <a:cs typeface="Calibri" panose="020F0502020204030204" pitchFamily="34" charset="0"/>
+              </a:rPr>
+            </a:br>
+            <a:r>
+              <a:rPr lang="ru-RU" sz="2200" b="0" i="0" dirty="0" smtClean="0">
+                <a:solidFill>
+                  <a:schemeClr val="bg1"/>
+                </a:solidFill>
+                <a:effectLst/>
+                <a:latin typeface="Calibri" panose="020F0502020204030204" pitchFamily="34" charset="0"/>
+                <a:cs typeface="Calibri" panose="020F0502020204030204" pitchFamily="34" charset="0"/>
+              </a:rPr>
+              <a:t>Разработать АИС, автоматизирующую цикл сбора и обработки данных о выборе научных направлений студентами.</a:t>
+            </a:r>
+            <a:endParaRPr lang="ru-RU" sz="2200" b="0" i="0" dirty="0" smtClean="0">
+              <a:solidFill>
+                <a:schemeClr val="bg1"/>
+              </a:solidFill>
+              <a:effectLst/>
+              <a:latin typeface="Calibri" panose="020F0502020204030204" pitchFamily="34" charset="0"/>
+              <a:cs typeface="Calibri" panose="020F0502020204030204" pitchFamily="34" charset="0"/>
+            </a:endParaRPr>
+          </a:p>
+          <a:p>
+            <a:r>
+              <a:rPr lang="ru-RU" sz="2200" b="1" i="0" dirty="0" smtClean="0">
+                <a:solidFill>
+                  <a:schemeClr val="bg1"/>
+                </a:solidFill>
+                <a:effectLst/>
+                <a:latin typeface="Calibri" panose="020F0502020204030204" pitchFamily="34" charset="0"/>
+                <a:cs typeface="Calibri" panose="020F0502020204030204" pitchFamily="34" charset="0"/>
+              </a:rPr>
+              <a:t>Ожидаемый результат:</a:t>
+            </a:r>
+            <a:br>
+              <a:rPr lang="ru-RU" sz="2200" b="0" i="0" dirty="0" smtClean="0">
+                <a:solidFill>
+                  <a:schemeClr val="bg1"/>
+                </a:solidFill>
+                <a:effectLst/>
+                <a:latin typeface="Calibri" panose="020F0502020204030204" pitchFamily="34" charset="0"/>
+                <a:cs typeface="Calibri" panose="020F0502020204030204" pitchFamily="34" charset="0"/>
+              </a:rPr>
+            </a:br>
+            <a:r>
+              <a:rPr lang="ru-RU" sz="2200" b="0" i="0" dirty="0" smtClean="0">
+                <a:solidFill>
+                  <a:schemeClr val="bg1"/>
+                </a:solidFill>
+                <a:effectLst/>
+                <a:latin typeface="Calibri" panose="020F0502020204030204" pitchFamily="34" charset="0"/>
+                <a:cs typeface="Calibri" panose="020F0502020204030204" pitchFamily="34" charset="0"/>
+              </a:rPr>
+              <a:t>Полностью автоматизированный цикл: от выдачи бланка до итогового отчета проректору без ручной группировки и с минимизацией ошибок.</a:t>
+            </a:r>
+            <a:endParaRPr lang="ru-RU" sz="2200" b="0" i="0" dirty="0">
+              <a:solidFill>
+                <a:schemeClr val="bg1"/>
+              </a:solidFill>
+              <a:effectLst/>
+              <a:latin typeface="Calibri" panose="020F0502020204030204" pitchFamily="34" charset="0"/>
+              <a:cs typeface="Calibri" panose="020F0502020204030204" pitchFamily="34" charset="0"/>
+            </a:endParaRPr>
+          </a:p>
+        </p:txBody>
+      </p:sp>
+      <p:sp>
+        <p:nvSpPr>
+          <p:cNvPr id="5" name="Текстовое поле 4">
+            <a:hlinkClick r:id="rId1" tooltip="" action="ppaction://hlinksldjump"/>
+          </p:cNvPr>
+          <p:cNvSpPr txBox="1"/>
+          <p:nvPr/>
+        </p:nvSpPr>
+        <p:spPr>
+          <a:xfrm>
+            <a:off x="10215880" y="208280"/>
+            <a:ext cx="1758315" cy="429895"/>
+          </a:xfrm>
+          <a:prstGeom prst="rect">
+            <a:avLst/>
+          </a:prstGeom>
+          <a:noFill/>
+        </p:spPr>
+        <p:txBody>
+          <a:bodyPr wrap="square" rtlCol="0" anchor="t">
+            <a:spAutoFit/>
+          </a:bodyPr>
+          <a:p>
+            <a:r>
+              <a:rPr lang="ru-RU" altLang="en-US" sz="2200" dirty="0" smtClean="0">
                 <a:solidFill>
                   <a:schemeClr val="bg1"/>
                 </a:solidFill>
                 <a:effectLst/>
                 <a:latin typeface="quote-cjk-patch"/>
-              </a:rPr>
-              <a:t/>
-            </a:r>
-            <a:br>
-              <a:rPr lang="ru-RU" sz="2200" b="0" i="0" dirty="0" smtClean="0">
-                <a:solidFill>
-                  <a:schemeClr val="bg1"/>
-                </a:solidFill>
-                <a:effectLst/>
-                <a:latin typeface="quote-cjk-patch"/>
-              </a:rPr>
-            </a:br>
-            <a:r>
-              <a:rPr lang="ru-RU" sz="2200" b="0" i="0" dirty="0" smtClean="0">
-                <a:solidFill>
-                  <a:schemeClr val="bg1"/>
-                </a:solidFill>
-                <a:effectLst/>
-                <a:latin typeface="quote-cjk-patch"/>
-              </a:rPr>
-              <a:t>Ручной сбор данных о выборе научных направлений → ошибки, потери данных, сложность контроля лимитов, высокая трудоемкость группировки и проверки.</a:t>
-            </a:r>
-          </a:p>
-          <a:p>
-            <a:r>
-              <a:rPr lang="ru-RU" sz="2200" b="1" i="0" dirty="0" smtClean="0">
-                <a:solidFill>
-                  <a:schemeClr val="bg1"/>
-                </a:solidFill>
-                <a:effectLst/>
-                <a:latin typeface="quote-cjk-patch"/>
-              </a:rPr>
-              <a:t>Цель:</a:t>
-            </a:r>
-            <a:r>
-              <a:rPr lang="ru-RU" sz="2200" b="0" i="0" dirty="0" smtClean="0">
-                <a:solidFill>
-                  <a:schemeClr val="bg1"/>
-                </a:solidFill>
-                <a:effectLst/>
-                <a:latin typeface="quote-cjk-patch"/>
-              </a:rPr>
-              <a:t/>
-            </a:r>
-            <a:br>
-              <a:rPr lang="ru-RU" sz="2200" b="0" i="0" dirty="0" smtClean="0">
-                <a:solidFill>
-                  <a:schemeClr val="bg1"/>
-                </a:solidFill>
-                <a:effectLst/>
-                <a:latin typeface="quote-cjk-patch"/>
-              </a:rPr>
-            </a:br>
-            <a:r>
-              <a:rPr lang="ru-RU" sz="2200" b="0" i="0" dirty="0" smtClean="0">
-                <a:solidFill>
-                  <a:schemeClr val="bg1"/>
-                </a:solidFill>
-                <a:effectLst/>
-                <a:latin typeface="quote-cjk-patch"/>
-              </a:rPr>
-              <a:t>Разработать АИС, автоматизирующую цикл сбора и обработки данных о выборе научных направлений студентами.</a:t>
-            </a:r>
-          </a:p>
-          <a:p>
-            <a:r>
-              <a:rPr lang="ru-RU" sz="2200" b="1" i="0" dirty="0" smtClean="0">
-                <a:solidFill>
-                  <a:schemeClr val="bg1"/>
-                </a:solidFill>
-                <a:effectLst/>
-                <a:latin typeface="quote-cjk-patch"/>
-              </a:rPr>
-              <a:t>Ожидаемый результат:</a:t>
-            </a:r>
-            <a:r>
-              <a:rPr lang="ru-RU" sz="2200" b="0" i="0" dirty="0" smtClean="0">
-                <a:solidFill>
-                  <a:schemeClr val="bg1"/>
-                </a:solidFill>
-                <a:effectLst/>
-                <a:latin typeface="quote-cjk-patch"/>
-              </a:rPr>
-              <a:t/>
-            </a:r>
-            <a:br>
-              <a:rPr lang="ru-RU" sz="2200" b="0" i="0" dirty="0" smtClean="0">
-                <a:solidFill>
-                  <a:schemeClr val="bg1"/>
-                </a:solidFill>
-                <a:effectLst/>
-                <a:latin typeface="quote-cjk-patch"/>
-              </a:rPr>
-            </a:br>
-            <a:r>
-              <a:rPr lang="ru-RU" sz="2200" b="0" i="0" dirty="0" smtClean="0">
-                <a:solidFill>
-                  <a:schemeClr val="bg1"/>
-                </a:solidFill>
-                <a:effectLst/>
-                <a:latin typeface="quote-cjk-patch"/>
-              </a:rPr>
-              <a:t>Полностью автоматизированный цикл: от выдачи бланка до итогового отчета проректору без ручной группировки и с минимизацией ошибок.</a:t>
-            </a:r>
-            <a:endParaRPr lang="ru-RU" sz="2200" b="0" i="0" dirty="0">
+                <a:sym typeface="+mn-ea"/>
+              </a:rPr>
+              <a:t>Оглавление</a:t>
+            </a:r>
+            <a:endParaRPr lang="ru-RU" altLang="en-US" sz="2200" dirty="0" smtClean="0">
               <a:solidFill>
                 <a:schemeClr val="bg1"/>
               </a:solidFill>
               <a:effectLst/>
               <a:latin typeface="quote-cjk-patch"/>
+              <a:sym typeface="+mn-ea"/>
+            </a:endParaRPr>
+          </a:p>
+        </p:txBody>
+      </p:sp>
+      <p:sp>
+        <p:nvSpPr>
+          <p:cNvPr id="9" name="Текстовое поле 8"/>
+          <p:cNvSpPr txBox="1"/>
+          <p:nvPr/>
+        </p:nvSpPr>
+        <p:spPr>
+          <a:xfrm>
+            <a:off x="6593840" y="1208405"/>
+            <a:ext cx="5080000" cy="3317875"/>
+          </a:xfrm>
+          <a:prstGeom prst="rect">
+            <a:avLst/>
+          </a:prstGeom>
+        </p:spPr>
+        <p:txBody>
+          <a:bodyPr>
+            <a:noAutofit/>
+          </a:bodyPr>
+          <a:p>
+            <a:pPr marL="0" indent="0">
+              <a:lnSpc>
+                <a:spcPts val="2100"/>
+              </a:lnSpc>
+              <a:spcBef>
+                <a:spcPts val="1200"/>
+              </a:spcBef>
+              <a:spcAft>
+                <a:spcPct val="0"/>
+              </a:spcAft>
+            </a:pPr>
+            <a:r>
+              <a:rPr lang="ru-RU" sz="2200" b="1" dirty="0" smtClean="0">
+                <a:solidFill>
+                  <a:schemeClr val="bg1"/>
+                </a:solidFill>
+                <a:effectLst/>
+                <a:latin typeface="Calibri" panose="020F0502020204030204" pitchFamily="34" charset="0"/>
+                <a:cs typeface="Calibri" panose="020F0502020204030204" pitchFamily="34" charset="0"/>
+                <a:sym typeface="+mn-ea"/>
+              </a:rPr>
+              <a:t>Задачи по ролям:</a:t>
+            </a:r>
+            <a:endParaRPr sz="2200" b="0" i="0">
+              <a:solidFill>
+                <a:schemeClr val="bg1"/>
+              </a:solidFill>
+              <a:latin typeface="Calibri" panose="020F0502020204030204" pitchFamily="34" charset="0"/>
+              <a:ea typeface="quote-cjk-patch"/>
+              <a:cs typeface="Calibri" panose="020F0502020204030204" pitchFamily="34" charset="0"/>
+            </a:endParaRPr>
+          </a:p>
+          <a:p>
+            <a:pPr marL="0" indent="0">
+              <a:lnSpc>
+                <a:spcPts val="2100"/>
+              </a:lnSpc>
+              <a:spcBef>
+                <a:spcPts val="1200"/>
+              </a:spcBef>
+              <a:spcAft>
+                <a:spcPct val="0"/>
+              </a:spcAft>
+            </a:pPr>
+            <a:r>
+              <a:rPr sz="2200" b="0" i="0">
+                <a:solidFill>
+                  <a:schemeClr val="bg1"/>
+                </a:solidFill>
+                <a:latin typeface="Calibri" panose="020F0502020204030204" pitchFamily="34" charset="0"/>
+                <a:ea typeface="quote-cjk-patch"/>
+                <a:cs typeface="Calibri" panose="020F0502020204030204" pitchFamily="34" charset="0"/>
+              </a:rPr>
+              <a:t>Студент – выбирает направление</a:t>
+            </a:r>
+            <a:endParaRPr sz="2200" b="0" i="0">
+              <a:solidFill>
+                <a:schemeClr val="bg1"/>
+              </a:solidFill>
+              <a:latin typeface="Calibri" panose="020F0502020204030204" pitchFamily="34" charset="0"/>
+              <a:ea typeface="quote-cjk-patch"/>
+              <a:cs typeface="Calibri" panose="020F0502020204030204" pitchFamily="34" charset="0"/>
+            </a:endParaRPr>
+          </a:p>
+          <a:p>
+            <a:pPr marL="0" indent="0">
+              <a:lnSpc>
+                <a:spcPts val="2100"/>
+              </a:lnSpc>
+              <a:spcBef>
+                <a:spcPts val="1200"/>
+              </a:spcBef>
+              <a:spcAft>
+                <a:spcPct val="0"/>
+              </a:spcAft>
+            </a:pPr>
+            <a:r>
+              <a:rPr sz="2200" b="0" i="0">
+                <a:solidFill>
+                  <a:schemeClr val="bg1"/>
+                </a:solidFill>
+                <a:latin typeface="Calibri" panose="020F0502020204030204" pitchFamily="34" charset="0"/>
+                <a:ea typeface="quote-cjk-patch"/>
+                <a:cs typeface="Calibri" panose="020F0502020204030204" pitchFamily="34" charset="0"/>
+              </a:rPr>
+              <a:t>Преподаватель – проверяет данные</a:t>
+            </a:r>
+            <a:endParaRPr sz="2200" b="0" i="0">
+              <a:solidFill>
+                <a:schemeClr val="bg1"/>
+              </a:solidFill>
+              <a:latin typeface="Calibri" panose="020F0502020204030204" pitchFamily="34" charset="0"/>
+              <a:ea typeface="quote-cjk-patch"/>
+              <a:cs typeface="Calibri" panose="020F0502020204030204" pitchFamily="34" charset="0"/>
+            </a:endParaRPr>
+          </a:p>
+          <a:p>
+            <a:pPr marL="0" indent="0">
+              <a:lnSpc>
+                <a:spcPts val="2100"/>
+              </a:lnSpc>
+              <a:spcBef>
+                <a:spcPts val="1200"/>
+              </a:spcBef>
+              <a:spcAft>
+                <a:spcPct val="0"/>
+              </a:spcAft>
+            </a:pPr>
+            <a:r>
+              <a:rPr sz="2200" b="0" i="0">
+                <a:solidFill>
+                  <a:schemeClr val="bg1"/>
+                </a:solidFill>
+                <a:latin typeface="Calibri" panose="020F0502020204030204" pitchFamily="34" charset="0"/>
+                <a:ea typeface="quote-cjk-patch"/>
+                <a:cs typeface="Calibri" panose="020F0502020204030204" pitchFamily="34" charset="0"/>
+              </a:rPr>
+              <a:t>Куратор – контролирует лимиты</a:t>
+            </a:r>
+            <a:endParaRPr sz="2200" b="0" i="0">
+              <a:solidFill>
+                <a:schemeClr val="bg1"/>
+              </a:solidFill>
+              <a:latin typeface="Calibri" panose="020F0502020204030204" pitchFamily="34" charset="0"/>
+              <a:ea typeface="quote-cjk-patch"/>
+              <a:cs typeface="Calibri" panose="020F0502020204030204" pitchFamily="34" charset="0"/>
+            </a:endParaRPr>
+          </a:p>
+          <a:p>
+            <a:pPr marL="0" indent="0">
+              <a:lnSpc>
+                <a:spcPts val="2100"/>
+              </a:lnSpc>
+              <a:spcBef>
+                <a:spcPts val="1200"/>
+              </a:spcBef>
+              <a:spcAft>
+                <a:spcPct val="0"/>
+              </a:spcAft>
+            </a:pPr>
+            <a:r>
+              <a:rPr sz="2200" b="0" i="0">
+                <a:solidFill>
+                  <a:schemeClr val="bg1"/>
+                </a:solidFill>
+                <a:latin typeface="Calibri" panose="020F0502020204030204" pitchFamily="34" charset="0"/>
+                <a:ea typeface="quote-cjk-patch"/>
+                <a:cs typeface="Calibri" panose="020F0502020204030204" pitchFamily="34" charset="0"/>
+              </a:rPr>
+              <a:t>Методист – ведёт бланки</a:t>
+            </a:r>
+            <a:endParaRPr sz="2200" b="0" i="0">
+              <a:solidFill>
+                <a:schemeClr val="bg1"/>
+              </a:solidFill>
+              <a:latin typeface="Calibri" panose="020F0502020204030204" pitchFamily="34" charset="0"/>
+              <a:ea typeface="quote-cjk-patch"/>
+              <a:cs typeface="Calibri" panose="020F0502020204030204" pitchFamily="34" charset="0"/>
+            </a:endParaRPr>
+          </a:p>
+          <a:p>
+            <a:pPr marL="0" indent="0">
+              <a:lnSpc>
+                <a:spcPts val="2100"/>
+              </a:lnSpc>
+              <a:spcBef>
+                <a:spcPts val="1200"/>
+              </a:spcBef>
+              <a:spcAft>
+                <a:spcPct val="0"/>
+              </a:spcAft>
+            </a:pPr>
+            <a:r>
+              <a:rPr sz="2200" b="0" i="0">
+                <a:solidFill>
+                  <a:schemeClr val="bg1"/>
+                </a:solidFill>
+                <a:latin typeface="Calibri" panose="020F0502020204030204" pitchFamily="34" charset="0"/>
+                <a:ea typeface="quote-cjk-patch"/>
+                <a:cs typeface="Calibri" panose="020F0502020204030204" pitchFamily="34" charset="0"/>
+              </a:rPr>
+              <a:t>Аналитик – считает статистику</a:t>
+            </a:r>
+            <a:endParaRPr sz="2200" b="0" i="0">
+              <a:solidFill>
+                <a:schemeClr val="bg1"/>
+              </a:solidFill>
+              <a:latin typeface="Calibri" panose="020F0502020204030204" pitchFamily="34" charset="0"/>
+              <a:ea typeface="quote-cjk-patch"/>
+              <a:cs typeface="Calibri" panose="020F0502020204030204" pitchFamily="34" charset="0"/>
+            </a:endParaRPr>
+          </a:p>
+          <a:p>
+            <a:pPr marL="0" indent="0">
+              <a:lnSpc>
+                <a:spcPts val="2100"/>
+              </a:lnSpc>
+              <a:spcBef>
+                <a:spcPts val="1200"/>
+              </a:spcBef>
+              <a:spcAft>
+                <a:spcPct val="0"/>
+              </a:spcAft>
+            </a:pPr>
+            <a:r>
+              <a:rPr sz="2200" b="0" i="0">
+                <a:solidFill>
+                  <a:schemeClr val="bg1"/>
+                </a:solidFill>
+                <a:latin typeface="Calibri" panose="020F0502020204030204" pitchFamily="34" charset="0"/>
+                <a:ea typeface="quote-cjk-patch"/>
+                <a:cs typeface="Calibri" panose="020F0502020204030204" pitchFamily="34" charset="0"/>
+              </a:rPr>
+              <a:t>Проректор – получает отчёт</a:t>
+            </a:r>
+            <a:endParaRPr sz="2200" b="0" i="0">
+              <a:solidFill>
+                <a:schemeClr val="bg1"/>
+              </a:solidFill>
+              <a:latin typeface="Calibri" panose="020F0502020204030204" pitchFamily="34" charset="0"/>
+              <a:ea typeface="quote-cjk-patch"/>
+              <a:cs typeface="Calibri" panose="020F0502020204030204" pitchFamily="34" charset="0"/>
             </a:endParaRPr>
           </a:p>
         </p:txBody>
       </p:sp>
     </p:spTree>
-    <p:extLst>
-      <p:ext uri="{BB962C8B-B14F-4D97-AF65-F5344CB8AC3E}">
-        <p14:creationId xmlns:p14="http://schemas.microsoft.com/office/powerpoint/2010/main" val="2032268186"/>
-      </p:ext>
-    </p:extLst>
   </p:cSld>
   <p:clrMapOvr>
     <a:masterClrMapping/>
@@ -7312,8 +8946,8 @@
         </p:nvSpPr>
         <p:spPr>
           <a:xfrm>
-            <a:off x="0" y="1"/>
-            <a:ext cx="10792691" cy="876299"/>
+            <a:off x="51435" y="95250"/>
+            <a:ext cx="10792460" cy="759460"/>
           </a:xfrm>
         </p:spPr>
         <p:txBody>
@@ -7324,14 +8958,14 @@
           <a:p>
             <a:pPr algn="l"/>
             <a:r>
-              <a:rPr lang="ru-RU" dirty="0" smtClean="0">
+              <a:rPr lang="ru-RU" sz="4445" dirty="0" smtClean="0">
                 <a:solidFill>
                   <a:schemeClr val="bg1"/>
                 </a:solidFill>
               </a:rPr>
               <a:t>Функциональный анализ №1</a:t>
             </a:r>
-            <a:endParaRPr lang="ru-RU" dirty="0">
+            <a:endParaRPr lang="ru-RU" sz="4445" dirty="0">
               <a:solidFill>
                 <a:schemeClr val="bg1"/>
               </a:solidFill>
@@ -7346,9 +8980,11 @@
           <p:nvPr/>
         </p:nvPicPr>
         <p:blipFill rotWithShape="1">
-          <a:blip r:embed="rId2"/>
+          <a:blip r:embed="rId1"/>
           <a:srcRect t="2244" r="3441" b="3804"/>
-          <a:stretch/>
+          <a:stretch>
+            <a:fillRect/>
+          </a:stretch>
         </p:blipFill>
         <p:spPr>
           <a:xfrm>
@@ -7369,7 +9005,7 @@
         <p:spPr>
           <a:xfrm>
             <a:off x="0" y="5444629"/>
-            <a:ext cx="5940425" cy="369332"/>
+            <a:ext cx="5940425" cy="368300"/>
           </a:xfrm>
           <a:prstGeom prst="rect">
             <a:avLst/>
@@ -7387,15 +9023,17 @@
                 <a:solidFill>
                   <a:schemeClr val="bg1"/>
                 </a:solidFill>
-                <a:latin typeface="quote-cjk-patch"/>
-              </a:rPr>
-              <a:t>Рис. №1 «ДВИ»</a:t>
+                <a:latin typeface="Calibri" panose="020F0502020204030204" pitchFamily="34" charset="0"/>
+                <a:cs typeface="Calibri" panose="020F0502020204030204" pitchFamily="34" charset="0"/>
+              </a:rPr>
+              <a:t>ДВИ</a:t>
             </a:r>
             <a:endParaRPr lang="ru-RU" dirty="0">
               <a:solidFill>
                 <a:schemeClr val="bg1"/>
               </a:solidFill>
-              <a:latin typeface="quote-cjk-patch"/>
+              <a:latin typeface="Calibri" panose="020F0502020204030204" pitchFamily="34" charset="0"/>
+              <a:cs typeface="Calibri" panose="020F0502020204030204" pitchFamily="34" charset="0"/>
             </a:endParaRPr>
           </a:p>
         </p:txBody>
@@ -7407,9 +9045,11 @@
           <p:nvPr/>
         </p:nvPicPr>
         <p:blipFill rotWithShape="1">
-          <a:blip r:embed="rId3"/>
+          <a:blip r:embed="rId2"/>
           <a:srcRect l="16201" t="-510" r="18689" b="510"/>
-          <a:stretch/>
+          <a:stretch>
+            <a:fillRect/>
+          </a:stretch>
         </p:blipFill>
         <p:spPr>
           <a:xfrm>
@@ -7429,8 +9069,8 @@
         </p:nvSpPr>
         <p:spPr>
           <a:xfrm>
-            <a:off x="10251405" y="5813961"/>
-            <a:ext cx="1940596" cy="646331"/>
+            <a:off x="10843878" y="5813961"/>
+            <a:ext cx="1045210" cy="645160"/>
           </a:xfrm>
           <a:prstGeom prst="rect">
             <a:avLst/>
@@ -7448,16 +9088,18 @@
                 <a:solidFill>
                   <a:schemeClr val="bg1"/>
                 </a:solidFill>
-                <a:latin typeface="quote-cjk-patch"/>
-              </a:rPr>
-              <a:t>Рис. №3 «Древо</a:t>
+                <a:latin typeface="Calibri" panose="020F0502020204030204" pitchFamily="34" charset="0"/>
+                <a:cs typeface="Calibri" panose="020F0502020204030204" pitchFamily="34" charset="0"/>
+              </a:rPr>
+              <a:t>Древо</a:t>
             </a:r>
             <a:br>
               <a:rPr lang="ru-RU" dirty="0" smtClean="0">
                 <a:solidFill>
                   <a:schemeClr val="bg1"/>
                 </a:solidFill>
-                <a:latin typeface="quote-cjk-patch"/>
+                <a:latin typeface="Calibri" panose="020F0502020204030204" pitchFamily="34" charset="0"/>
+                <a:cs typeface="Calibri" panose="020F0502020204030204" pitchFamily="34" charset="0"/>
               </a:rPr>
             </a:br>
             <a:r>
@@ -7465,15 +9107,17 @@
                 <a:solidFill>
                   <a:schemeClr val="bg1"/>
                 </a:solidFill>
-                <a:latin typeface="quote-cjk-patch"/>
-              </a:rPr>
-              <a:t>Функций»</a:t>
+                <a:latin typeface="Calibri" panose="020F0502020204030204" pitchFamily="34" charset="0"/>
+                <a:cs typeface="Calibri" panose="020F0502020204030204" pitchFamily="34" charset="0"/>
+              </a:rPr>
+              <a:t>Функций</a:t>
             </a:r>
             <a:endParaRPr lang="ru-RU" dirty="0">
               <a:solidFill>
                 <a:schemeClr val="bg1"/>
               </a:solidFill>
-              <a:latin typeface="quote-cjk-patch"/>
+              <a:latin typeface="Calibri" panose="020F0502020204030204" pitchFamily="34" charset="0"/>
+              <a:cs typeface="Calibri" panose="020F0502020204030204" pitchFamily="34" charset="0"/>
             </a:endParaRPr>
           </a:p>
         </p:txBody>
@@ -7485,7 +9129,7 @@
           <p:nvPr/>
         </p:nvPicPr>
         <p:blipFill>
-          <a:blip r:embed="rId4"/>
+          <a:blip r:embed="rId3"/>
           <a:stretch>
             <a:fillRect/>
           </a:stretch>
@@ -7509,7 +9153,7 @@
         <p:spPr>
           <a:xfrm>
             <a:off x="4994482" y="4174711"/>
-            <a:ext cx="6096000" cy="369332"/>
+            <a:ext cx="6096000" cy="368300"/>
           </a:xfrm>
           <a:prstGeom prst="rect">
             <a:avLst/>
@@ -7527,25 +9171,67 @@
                 <a:solidFill>
                   <a:schemeClr val="bg1"/>
                 </a:solidFill>
+                <a:latin typeface="Calibri" panose="020F0502020204030204" pitchFamily="34" charset="0"/>
+                <a:cs typeface="Calibri" panose="020F0502020204030204" pitchFamily="34" charset="0"/>
+              </a:rPr>
+              <a:t>Органиограмма</a:t>
+            </a:r>
+            <a:endParaRPr lang="ru-RU" dirty="0">
+              <a:solidFill>
+                <a:schemeClr val="bg1"/>
+              </a:solidFill>
+              <a:latin typeface="Calibri" panose="020F0502020204030204" pitchFamily="34" charset="0"/>
+              <a:cs typeface="Calibri" panose="020F0502020204030204" pitchFamily="34" charset="0"/>
+            </a:endParaRPr>
+          </a:p>
+        </p:txBody>
+      </p:sp>
+      <p:sp>
+        <p:nvSpPr>
+          <p:cNvPr id="10" name="Текстовое поле 9">
+            <a:hlinkClick r:id="rId4" action="ppaction://hlinksldjump"/>
+          </p:cNvPr>
+          <p:cNvSpPr txBox="1"/>
+          <p:nvPr/>
+        </p:nvSpPr>
+        <p:spPr>
+          <a:xfrm>
+            <a:off x="10215880" y="208280"/>
+            <a:ext cx="1758315" cy="429895"/>
+          </a:xfrm>
+          <a:prstGeom prst="rect">
+            <a:avLst/>
+          </a:prstGeom>
+          <a:noFill/>
+        </p:spPr>
+        <p:txBody>
+          <a:bodyPr wrap="square" rtlCol="0" anchor="t">
+            <a:spAutoFit/>
+          </a:bodyPr>
+          <a:p>
+            <a:r>
+              <a:rPr lang="ru-RU" altLang="en-US" sz="2200" dirty="0" smtClean="0">
+                <a:solidFill>
+                  <a:schemeClr val="bg1"/>
+                </a:solidFill>
+                <a:effectLst/>
                 <a:latin typeface="quote-cjk-patch"/>
-              </a:rPr>
-              <a:t>Рис. №3 «Органиограмма»</a:t>
-            </a:r>
-            <a:endParaRPr lang="ru-RU" dirty="0">
+                <a:sym typeface="+mn-ea"/>
+              </a:rPr>
+              <a:t>Оглавление</a:t>
+            </a:r>
+            <a:endParaRPr lang="ru-RU" altLang="en-US" sz="2200" dirty="0" smtClean="0">
               <a:solidFill>
                 <a:schemeClr val="bg1"/>
               </a:solidFill>
+              <a:effectLst/>
               <a:latin typeface="quote-cjk-patch"/>
+              <a:sym typeface="+mn-ea"/>
             </a:endParaRPr>
           </a:p>
         </p:txBody>
       </p:sp>
     </p:spTree>
-    <p:extLst>
-      <p:ext uri="{BB962C8B-B14F-4D97-AF65-F5344CB8AC3E}">
-        <p14:creationId xmlns:p14="http://schemas.microsoft.com/office/powerpoint/2010/main" val="1916116109"/>
-      </p:ext>
-    </p:extLst>
   </p:cSld>
   <p:clrMapOvr>
     <a:masterClrMapping/>
@@ -7611,20 +9297,20 @@
         </p:spPr>
         <p:txBody>
           <a:bodyPr>
-            <a:normAutofit fontScale="90000"/>
+            <a:normAutofit/>
           </a:bodyPr>
           <a:lstStyle/>
           <a:p>
             <a:pPr algn="l"/>
             <a:r>
-              <a:rPr lang="ru-RU" dirty="0" smtClean="0">
+              <a:rPr lang="ru-RU" sz="4000" dirty="0" smtClean="0">
                 <a:solidFill>
                   <a:schemeClr val="bg1"/>
                 </a:solidFill>
               </a:rPr>
               <a:t>Функциональный анализ №2</a:t>
             </a:r>
-            <a:endParaRPr lang="ru-RU" dirty="0">
+            <a:endParaRPr lang="ru-RU" sz="4000" dirty="0">
               <a:solidFill>
                 <a:schemeClr val="bg1"/>
               </a:solidFill>
@@ -7716,13 +9402,7 @@
           <p:cNvGraphicFramePr>
             <a:graphicFrameLocks noGrp="1"/>
           </p:cNvGraphicFramePr>
-          <p:nvPr>
-            <p:extLst>
-              <p:ext uri="{D42A27DB-BD31-4B8C-83A1-F6EECF244321}">
-                <p14:modId xmlns:p14="http://schemas.microsoft.com/office/powerpoint/2010/main" val="1004304208"/>
-              </p:ext>
-            </p:extLst>
-          </p:nvPr>
+          <p:nvPr/>
         </p:nvGraphicFramePr>
         <p:xfrm>
           <a:off x="519703" y="4762247"/>
@@ -7735,41 +9415,11 @@
                 <a:tableStyleId>{5C22544A-7EE6-4342-B048-85BDC9FD1C3A}</a:tableStyleId>
               </a:tblPr>
               <a:tblGrid>
-                <a:gridCol w="304483">
-                  <a:extLst>
-                    <a:ext uri="{9D8B030D-6E8A-4147-A177-3AD203B41FA5}">
-                      <a16:colId xmlns:a16="http://schemas.microsoft.com/office/drawing/2014/main" val="3870433530"/>
-                    </a:ext>
-                  </a:extLst>
-                </a:gridCol>
-                <a:gridCol w="2324100">
-                  <a:extLst>
-                    <a:ext uri="{9D8B030D-6E8A-4147-A177-3AD203B41FA5}">
-                      <a16:colId xmlns:a16="http://schemas.microsoft.com/office/drawing/2014/main" val="2690385954"/>
-                    </a:ext>
-                  </a:extLst>
-                </a:gridCol>
-                <a:gridCol w="3671828">
-                  <a:extLst>
-                    <a:ext uri="{9D8B030D-6E8A-4147-A177-3AD203B41FA5}">
-                      <a16:colId xmlns:a16="http://schemas.microsoft.com/office/drawing/2014/main" val="1792416381"/>
-                    </a:ext>
-                  </a:extLst>
-                </a:gridCol>
-                <a:gridCol w="1773941">
-                  <a:extLst>
-                    <a:ext uri="{9D8B030D-6E8A-4147-A177-3AD203B41FA5}">
-                      <a16:colId xmlns:a16="http://schemas.microsoft.com/office/drawing/2014/main" val="3854285323"/>
-                    </a:ext>
-                  </a:extLst>
-                </a:gridCol>
-                <a:gridCol w="1678932">
-                  <a:extLst>
-                    <a:ext uri="{9D8B030D-6E8A-4147-A177-3AD203B41FA5}">
-                      <a16:colId xmlns:a16="http://schemas.microsoft.com/office/drawing/2014/main" val="898783571"/>
-                    </a:ext>
-                  </a:extLst>
-                </a:gridCol>
+                <a:gridCol w="304483"/>
+                <a:gridCol w="2324100"/>
+                <a:gridCol w="3671828"/>
+                <a:gridCol w="1773941"/>
+                <a:gridCol w="1678932"/>
               </a:tblGrid>
               <a:tr h="279436">
                 <a:tc>
@@ -7917,11 +9567,6 @@
                   </a:txBody>
                   <a:tcPr marL="68580" marR="68580" marT="0" marB="0" anchor="ctr"/>
                 </a:tc>
-                <a:extLst>
-                  <a:ext uri="{0D108BD9-81ED-4DB2-BD59-A6C34878D82A}">
-                    <a16:rowId xmlns:a16="http://schemas.microsoft.com/office/drawing/2014/main" val="3439921690"/>
-                  </a:ext>
-                </a:extLst>
               </a:tr>
               <a:tr h="838308">
                 <a:tc rowSpan="2">
@@ -8069,31 +9714,12 @@
                   </a:txBody>
                   <a:tcPr marL="68580" marR="68580" marT="0" marB="0" anchor="ctr"/>
                 </a:tc>
-                <a:extLst>
-                  <a:ext uri="{0D108BD9-81ED-4DB2-BD59-A6C34878D82A}">
-                    <a16:rowId xmlns:a16="http://schemas.microsoft.com/office/drawing/2014/main" val="1066021170"/>
-                  </a:ext>
-                </a:extLst>
               </a:tr>
               <a:tr h="838308">
                 <a:tc vMerge="1">
-                  <a:txBody>
-                    <a:bodyPr/>
-                    <a:lstStyle/>
-                    <a:p>
-                      <a:endParaRPr lang="ru-RU"/>
-                    </a:p>
-                  </a:txBody>
                   <a:tcPr/>
                 </a:tc>
                 <a:tc vMerge="1">
-                  <a:txBody>
-                    <a:bodyPr/>
-                    <a:lstStyle/>
-                    <a:p>
-                      <a:endParaRPr lang="ru-RU"/>
-                    </a:p>
-                  </a:txBody>
                   <a:tcPr/>
                 </a:tc>
                 <a:tc>
@@ -8183,11 +9809,6 @@
                   </a:txBody>
                   <a:tcPr marL="68580" marR="68580" marT="0" marB="0" anchor="ctr"/>
                 </a:tc>
-                <a:extLst>
-                  <a:ext uri="{0D108BD9-81ED-4DB2-BD59-A6C34878D82A}">
-                    <a16:rowId xmlns:a16="http://schemas.microsoft.com/office/drawing/2014/main" val="737055986"/>
-                  </a:ext>
-                </a:extLst>
               </a:tr>
             </a:tbl>
           </a:graphicData>
@@ -8199,13 +9820,7 @@
           <p:cNvGraphicFramePr>
             <a:graphicFrameLocks noGrp="1"/>
           </p:cNvGraphicFramePr>
-          <p:nvPr>
-            <p:extLst>
-              <p:ext uri="{D42A27DB-BD31-4B8C-83A1-F6EECF244321}">
-                <p14:modId xmlns:p14="http://schemas.microsoft.com/office/powerpoint/2010/main" val="730930724"/>
-              </p:ext>
-            </p:extLst>
-          </p:nvPr>
+          <p:nvPr/>
         </p:nvGraphicFramePr>
         <p:xfrm>
           <a:off x="519703" y="1157590"/>
@@ -8218,41 +9833,11 @@
                 <a:tableStyleId>{5C22544A-7EE6-4342-B048-85BDC9FD1C3A}</a:tableStyleId>
               </a:tblPr>
               <a:tblGrid>
-                <a:gridCol w="449010">
-                  <a:extLst>
-                    <a:ext uri="{9D8B030D-6E8A-4147-A177-3AD203B41FA5}">
-                      <a16:colId xmlns:a16="http://schemas.microsoft.com/office/drawing/2014/main" val="3024362780"/>
-                    </a:ext>
-                  </a:extLst>
-                </a:gridCol>
-                <a:gridCol w="1728516">
-                  <a:extLst>
-                    <a:ext uri="{9D8B030D-6E8A-4147-A177-3AD203B41FA5}">
-                      <a16:colId xmlns:a16="http://schemas.microsoft.com/office/drawing/2014/main" val="704448928"/>
-                    </a:ext>
-                  </a:extLst>
-                </a:gridCol>
-                <a:gridCol w="2315249">
-                  <a:extLst>
-                    <a:ext uri="{9D8B030D-6E8A-4147-A177-3AD203B41FA5}">
-                      <a16:colId xmlns:a16="http://schemas.microsoft.com/office/drawing/2014/main" val="2485055205"/>
-                    </a:ext>
-                  </a:extLst>
-                </a:gridCol>
-                <a:gridCol w="1789976">
-                  <a:extLst>
-                    <a:ext uri="{9D8B030D-6E8A-4147-A177-3AD203B41FA5}">
-                      <a16:colId xmlns:a16="http://schemas.microsoft.com/office/drawing/2014/main" val="3641396293"/>
-                    </a:ext>
-                  </a:extLst>
-                </a:gridCol>
-                <a:gridCol w="3470534">
-                  <a:extLst>
-                    <a:ext uri="{9D8B030D-6E8A-4147-A177-3AD203B41FA5}">
-                      <a16:colId xmlns:a16="http://schemas.microsoft.com/office/drawing/2014/main" val="801000591"/>
-                    </a:ext>
-                  </a:extLst>
-                </a:gridCol>
+                <a:gridCol w="449010"/>
+                <a:gridCol w="1728516"/>
+                <a:gridCol w="2315249"/>
+                <a:gridCol w="1789976"/>
+                <a:gridCol w="3470534"/>
               </a:tblGrid>
               <a:tr h="219239">
                 <a:tc>
@@ -8400,11 +9985,6 @@
                   </a:txBody>
                   <a:tcPr marL="68580" marR="68580" marT="0" marB="0" anchor="ctr"/>
                 </a:tc>
-                <a:extLst>
-                  <a:ext uri="{0D108BD9-81ED-4DB2-BD59-A6C34878D82A}">
-                    <a16:rowId xmlns:a16="http://schemas.microsoft.com/office/drawing/2014/main" val="1551290511"/>
-                  </a:ext>
-                </a:extLst>
               </a:tr>
               <a:tr h="1278458">
                 <a:tc>
@@ -8484,6 +10064,9 @@
                         </a:rPr>
                         <a:t>Список направлений</a:t>
                       </a:r>
+                      <a:endParaRPr lang="ru-RU" sz="1400" kern="100">
+                        <a:effectLst/>
+                      </a:endParaRPr>
                     </a:p>
                     <a:p>
                       <a:pPr>
@@ -8529,6 +10112,9 @@
                         </a:rPr>
                         <a:t>Бланк научных направлений</a:t>
                       </a:r>
+                      <a:endParaRPr lang="ru-RU" sz="1400" kern="100">
+                        <a:effectLst/>
+                      </a:endParaRPr>
                     </a:p>
                     <a:p>
                       <a:pPr>
@@ -8574,6 +10160,9 @@
                         </a:rPr>
                         <a:t>Документ, содержащий список актуальных научных направлений</a:t>
                       </a:r>
+                      <a:endParaRPr lang="ru-RU" sz="1400" kern="100" dirty="0">
+                        <a:effectLst/>
+                      </a:endParaRPr>
                     </a:p>
                     <a:p>
                       <a:pPr>
@@ -8600,11 +10189,6 @@
                   </a:txBody>
                   <a:tcPr marL="68580" marR="68580" marT="0" marB="0" anchor="ctr"/>
                 </a:tc>
-                <a:extLst>
-                  <a:ext uri="{0D108BD9-81ED-4DB2-BD59-A6C34878D82A}">
-                    <a16:rowId xmlns:a16="http://schemas.microsoft.com/office/drawing/2014/main" val="245921844"/>
-                  </a:ext>
-                </a:extLst>
               </a:tr>
               <a:tr h="921481">
                 <a:tc rowSpan="2">
@@ -8771,31 +10355,12 @@
                   </a:txBody>
                   <a:tcPr marL="68580" marR="68580" marT="0" marB="0" anchor="ctr"/>
                 </a:tc>
-                <a:extLst>
-                  <a:ext uri="{0D108BD9-81ED-4DB2-BD59-A6C34878D82A}">
-                    <a16:rowId xmlns:a16="http://schemas.microsoft.com/office/drawing/2014/main" val="1719372860"/>
-                  </a:ext>
-                </a:extLst>
               </a:tr>
               <a:tr h="626932">
                 <a:tc vMerge="1">
-                  <a:txBody>
-                    <a:bodyPr/>
-                    <a:lstStyle/>
-                    <a:p>
-                      <a:endParaRPr lang="ru-RU"/>
-                    </a:p>
-                  </a:txBody>
                   <a:tcPr/>
                 </a:tc>
                 <a:tc vMerge="1">
-                  <a:txBody>
-                    <a:bodyPr/>
-                    <a:lstStyle/>
-                    <a:p>
-                      <a:endParaRPr lang="ru-RU"/>
-                    </a:p>
-                  </a:txBody>
                   <a:tcPr/>
                 </a:tc>
                 <a:tc>
@@ -8904,22 +10469,57 @@
                   </a:txBody>
                   <a:tcPr marL="68580" marR="68580" marT="0" marB="0" anchor="ctr"/>
                 </a:tc>
-                <a:extLst>
-                  <a:ext uri="{0D108BD9-81ED-4DB2-BD59-A6C34878D82A}">
-                    <a16:rowId xmlns:a16="http://schemas.microsoft.com/office/drawing/2014/main" val="2198601327"/>
-                  </a:ext>
-                </a:extLst>
               </a:tr>
             </a:tbl>
           </a:graphicData>
         </a:graphic>
       </p:graphicFrame>
+      <p:sp>
+        <p:nvSpPr>
+          <p:cNvPr id="3" name="Текстовое поле 2">
+            <a:hlinkClick r:id="rId1" action="ppaction://hlinksldjump"/>
+          </p:cNvPr>
+          <p:cNvSpPr txBox="1"/>
+          <p:nvPr/>
+        </p:nvSpPr>
+        <p:spPr>
+          <a:xfrm>
+            <a:off x="10215880" y="208280"/>
+            <a:ext cx="1758315" cy="429895"/>
+          </a:xfrm>
+          <a:prstGeom prst="rect">
+            <a:avLst/>
+          </a:prstGeom>
+          <a:noFill/>
+        </p:spPr>
+        <p:txBody>
+          <a:bodyPr wrap="square" rtlCol="0" anchor="t">
+            <a:spAutoFit/>
+          </a:bodyPr>
+          <a:p>
+            <a:r>
+              <a:rPr lang="ru-RU" altLang="en-US" sz="2200" dirty="0" smtClean="0">
+                <a:solidFill>
+                  <a:schemeClr val="bg1"/>
+                </a:solidFill>
+                <a:effectLst/>
+                <a:latin typeface="quote-cjk-patch"/>
+                <a:sym typeface="+mn-ea"/>
+              </a:rPr>
+              <a:t>Оглавление</a:t>
+            </a:r>
+            <a:endParaRPr lang="ru-RU" altLang="en-US" sz="2200" dirty="0" smtClean="0">
+              <a:solidFill>
+                <a:schemeClr val="bg1"/>
+              </a:solidFill>
+              <a:effectLst/>
+              <a:latin typeface="quote-cjk-patch"/>
+              <a:sym typeface="+mn-ea"/>
+            </a:endParaRPr>
+          </a:p>
+        </p:txBody>
+      </p:sp>
     </p:spTree>
-    <p:extLst>
-      <p:ext uri="{BB962C8B-B14F-4D97-AF65-F5344CB8AC3E}">
-        <p14:creationId xmlns:p14="http://schemas.microsoft.com/office/powerpoint/2010/main" val="2923396003"/>
-      </p:ext>
-    </p:extLst>
   </p:cSld>
   <p:clrMapOvr>
     <a:masterClrMapping/>
@@ -9052,7 +10652,7 @@
           <p:nvPr/>
         </p:nvPicPr>
         <p:blipFill>
-          <a:blip r:embed="rId2"/>
+          <a:blip r:embed="rId1"/>
           <a:stretch>
             <a:fillRect/>
           </a:stretch>
@@ -9067,12 +10667,52 @@
           </a:prstGeom>
         </p:spPr>
       </p:pic>
+      <p:sp>
+        <p:nvSpPr>
+          <p:cNvPr id="5" name="Текстовое поле 4">
+            <a:hlinkClick r:id="rId2" action="ppaction://hlinksldjump"/>
+          </p:cNvPr>
+          <p:cNvSpPr txBox="1"/>
+          <p:nvPr/>
+        </p:nvSpPr>
+        <p:spPr>
+          <a:xfrm>
+            <a:off x="10215880" y="208280"/>
+            <a:ext cx="1758315" cy="429895"/>
+          </a:xfrm>
+          <a:prstGeom prst="rect">
+            <a:avLst/>
+          </a:prstGeom>
+          <a:noFill/>
+        </p:spPr>
+        <p:txBody>
+          <a:bodyPr wrap="square" rtlCol="0" anchor="t">
+            <a:spAutoFit/>
+          </a:bodyPr>
+          <a:p>
+            <a:r>
+              <a:rPr lang="ru-RU" altLang="en-US" sz="2200" dirty="0" smtClean="0">
+                <a:solidFill>
+                  <a:schemeClr val="bg1"/>
+                </a:solidFill>
+                <a:effectLst/>
+                <a:latin typeface="quote-cjk-patch"/>
+                <a:sym typeface="+mn-ea"/>
+              </a:rPr>
+              <a:t>Оглавление</a:t>
+            </a:r>
+            <a:endParaRPr lang="ru-RU" altLang="en-US" sz="2200" dirty="0" smtClean="0">
+              <a:solidFill>
+                <a:schemeClr val="bg1"/>
+              </a:solidFill>
+              <a:effectLst/>
+              <a:latin typeface="quote-cjk-patch"/>
+              <a:sym typeface="+mn-ea"/>
+            </a:endParaRPr>
+          </a:p>
+        </p:txBody>
+      </p:sp>
     </p:spTree>
-    <p:extLst>
-      <p:ext uri="{BB962C8B-B14F-4D97-AF65-F5344CB8AC3E}">
-        <p14:creationId xmlns:p14="http://schemas.microsoft.com/office/powerpoint/2010/main" val="128638176"/>
-      </p:ext>
-    </p:extLst>
   </p:cSld>
   <p:clrMapOvr>
     <a:masterClrMapping/>
@@ -9231,7 +10871,7 @@
           <p:nvPr/>
         </p:nvPicPr>
         <p:blipFill>
-          <a:blip r:embed="rId2"/>
+          <a:blip r:embed="rId1"/>
           <a:stretch>
             <a:fillRect/>
           </a:stretch>
@@ -9246,12 +10886,52 @@
           </a:prstGeom>
         </p:spPr>
       </p:pic>
+      <p:sp>
+        <p:nvSpPr>
+          <p:cNvPr id="3" name="Текстовое поле 2">
+            <a:hlinkClick r:id="rId2" action="ppaction://hlinksldjump"/>
+          </p:cNvPr>
+          <p:cNvSpPr txBox="1"/>
+          <p:nvPr/>
+        </p:nvSpPr>
+        <p:spPr>
+          <a:xfrm>
+            <a:off x="10215880" y="208280"/>
+            <a:ext cx="1758315" cy="429895"/>
+          </a:xfrm>
+          <a:prstGeom prst="rect">
+            <a:avLst/>
+          </a:prstGeom>
+          <a:noFill/>
+        </p:spPr>
+        <p:txBody>
+          <a:bodyPr wrap="square" rtlCol="0" anchor="t">
+            <a:spAutoFit/>
+          </a:bodyPr>
+          <a:p>
+            <a:r>
+              <a:rPr lang="ru-RU" altLang="en-US" sz="2200" dirty="0" smtClean="0">
+                <a:solidFill>
+                  <a:schemeClr val="bg1"/>
+                </a:solidFill>
+                <a:effectLst/>
+                <a:latin typeface="quote-cjk-patch"/>
+                <a:sym typeface="+mn-ea"/>
+              </a:rPr>
+              <a:t>Оглавление</a:t>
+            </a:r>
+            <a:endParaRPr lang="ru-RU" altLang="en-US" sz="2200" dirty="0" smtClean="0">
+              <a:solidFill>
+                <a:schemeClr val="bg1"/>
+              </a:solidFill>
+              <a:effectLst/>
+              <a:latin typeface="quote-cjk-patch"/>
+              <a:sym typeface="+mn-ea"/>
+            </a:endParaRPr>
+          </a:p>
+        </p:txBody>
+      </p:sp>
     </p:spTree>
-    <p:extLst>
-      <p:ext uri="{BB962C8B-B14F-4D97-AF65-F5344CB8AC3E}">
-        <p14:creationId xmlns:p14="http://schemas.microsoft.com/office/powerpoint/2010/main" val="417947627"/>
-      </p:ext>
-    </p:extLst>
   </p:cSld>
   <p:clrMapOvr>
     <a:masterClrMapping/>
@@ -9806,7 +11486,7 @@
           <p:nvPr/>
         </p:nvPicPr>
         <p:blipFill>
-          <a:blip r:embed="rId2"/>
+          <a:blip r:embed="rId1"/>
           <a:stretch>
             <a:fillRect/>
           </a:stretch>
@@ -10215,6 +11895,12 @@
               </a:rPr>
               <a:t>)</a:t>
             </a:r>
+            <a:endParaRPr lang="ru-RU" sz="1500" i="1" dirty="0">
+              <a:solidFill>
+                <a:srgbClr val="00FFFF"/>
+              </a:solidFill>
+              <a:latin typeface="Consolas" panose="020B0609020204030204" pitchFamily="49" charset="0"/>
+            </a:endParaRPr>
           </a:p>
           <a:p>
             <a:r>
@@ -10226,6 +11912,12 @@
               </a:rPr>
               <a:t>);</a:t>
             </a:r>
+            <a:endParaRPr lang="ru-RU" sz="1500" i="1" dirty="0">
+              <a:solidFill>
+                <a:srgbClr val="00FFFF"/>
+              </a:solidFill>
+              <a:latin typeface="Consolas" panose="020B0609020204030204" pitchFamily="49" charset="0"/>
+            </a:endParaRPr>
           </a:p>
         </p:txBody>
       </p:sp>
@@ -10276,7 +11968,7 @@
           <p:nvPr/>
         </p:nvPicPr>
         <p:blipFill>
-          <a:blip r:embed="rId3"/>
+          <a:blip r:embed="rId2"/>
           <a:stretch>
             <a:fillRect/>
           </a:stretch>
@@ -10625,7 +12317,7 @@
           <p:nvPr/>
         </p:nvPicPr>
         <p:blipFill>
-          <a:blip r:embed="rId4"/>
+          <a:blip r:embed="rId3"/>
           <a:stretch>
             <a:fillRect/>
           </a:stretch>
@@ -10640,12 +12332,52 @@
           </a:prstGeom>
         </p:spPr>
       </p:pic>
+      <p:sp>
+        <p:nvSpPr>
+          <p:cNvPr id="6" name="Текстовое поле 5">
+            <a:hlinkClick r:id="rId4" action="ppaction://hlinksldjump"/>
+          </p:cNvPr>
+          <p:cNvSpPr txBox="1"/>
+          <p:nvPr/>
+        </p:nvSpPr>
+        <p:spPr>
+          <a:xfrm>
+            <a:off x="10215880" y="208280"/>
+            <a:ext cx="1758315" cy="429895"/>
+          </a:xfrm>
+          <a:prstGeom prst="rect">
+            <a:avLst/>
+          </a:prstGeom>
+          <a:noFill/>
+        </p:spPr>
+        <p:txBody>
+          <a:bodyPr wrap="square" rtlCol="0" anchor="t">
+            <a:spAutoFit/>
+          </a:bodyPr>
+          <a:p>
+            <a:r>
+              <a:rPr lang="ru-RU" altLang="en-US" sz="2200" dirty="0" smtClean="0">
+                <a:solidFill>
+                  <a:schemeClr val="bg1"/>
+                </a:solidFill>
+                <a:effectLst/>
+                <a:latin typeface="quote-cjk-patch"/>
+                <a:sym typeface="+mn-ea"/>
+              </a:rPr>
+              <a:t>Оглавление</a:t>
+            </a:r>
+            <a:endParaRPr lang="ru-RU" altLang="en-US" sz="2200" dirty="0" smtClean="0">
+              <a:solidFill>
+                <a:schemeClr val="bg1"/>
+              </a:solidFill>
+              <a:effectLst/>
+              <a:latin typeface="quote-cjk-patch"/>
+              <a:sym typeface="+mn-ea"/>
+            </a:endParaRPr>
+          </a:p>
+        </p:txBody>
+      </p:sp>
     </p:spTree>
-    <p:extLst>
-      <p:ext uri="{BB962C8B-B14F-4D97-AF65-F5344CB8AC3E}">
-        <p14:creationId xmlns:p14="http://schemas.microsoft.com/office/powerpoint/2010/main" val="1992300521"/>
-      </p:ext>
-    </p:extLst>
   </p:cSld>
   <p:clrMapOvr>
     <a:masterClrMapping/>
@@ -10711,20 +12443,20 @@
         </p:spPr>
         <p:txBody>
           <a:bodyPr>
-            <a:normAutofit fontScale="90000"/>
+            <a:normAutofit/>
           </a:bodyPr>
           <a:lstStyle/>
           <a:p>
             <a:pPr algn="l"/>
             <a:r>
-              <a:rPr lang="ru-RU" dirty="0" smtClean="0">
+              <a:rPr lang="ru-RU" sz="4445" dirty="0" smtClean="0">
                 <a:solidFill>
                   <a:schemeClr val="bg1"/>
                 </a:solidFill>
               </a:rPr>
               <a:t>Хранимые процедуры, функции</a:t>
             </a:r>
-            <a:endParaRPr lang="ru-RU" dirty="0">
+            <a:endParaRPr lang="ru-RU" sz="4445" dirty="0">
               <a:solidFill>
                 <a:schemeClr val="bg1"/>
               </a:solidFill>
@@ -10939,6 +12671,12 @@
               </a:rPr>
               <a:t>DELIMITER //</a:t>
             </a:r>
+            <a:endParaRPr lang="en-US" sz="1500" i="1" dirty="0">
+              <a:solidFill>
+                <a:srgbClr val="00FFFF"/>
+              </a:solidFill>
+              <a:latin typeface="Consolas" panose="020B0609020204030204" pitchFamily="49" charset="0"/>
+            </a:endParaRPr>
           </a:p>
           <a:p>
             <a:r>
@@ -10968,6 +12706,12 @@
               </a:rPr>
               <a:t>() </a:t>
             </a:r>
+            <a:endParaRPr lang="en-US" sz="1500" i="1" dirty="0">
+              <a:solidFill>
+                <a:srgbClr val="00FFFF"/>
+              </a:solidFill>
+              <a:latin typeface="Consolas" panose="020B0609020204030204" pitchFamily="49" charset="0"/>
+            </a:endParaRPr>
           </a:p>
           <a:p>
             <a:r>
@@ -10979,6 +12723,12 @@
               </a:rPr>
               <a:t>RETURNS INT</a:t>
             </a:r>
+            <a:endParaRPr lang="en-US" sz="1500" i="1" dirty="0">
+              <a:solidFill>
+                <a:srgbClr val="00FFFF"/>
+              </a:solidFill>
+              <a:latin typeface="Consolas" panose="020B0609020204030204" pitchFamily="49" charset="0"/>
+            </a:endParaRPr>
           </a:p>
           <a:p>
             <a:r>
@@ -10990,6 +12740,12 @@
               </a:rPr>
               <a:t>READS SQL DATA</a:t>
             </a:r>
+            <a:endParaRPr lang="en-US" sz="1500" i="1" dirty="0">
+              <a:solidFill>
+                <a:srgbClr val="00FFFF"/>
+              </a:solidFill>
+              <a:latin typeface="Consolas" panose="020B0609020204030204" pitchFamily="49" charset="0"/>
+            </a:endParaRPr>
           </a:p>
           <a:p>
             <a:r>
@@ -11001,6 +12757,12 @@
               </a:rPr>
               <a:t>DETERMINISTIC</a:t>
             </a:r>
+            <a:endParaRPr lang="en-US" sz="1500" i="1" dirty="0">
+              <a:solidFill>
+                <a:srgbClr val="00FFFF"/>
+              </a:solidFill>
+              <a:latin typeface="Consolas" panose="020B0609020204030204" pitchFamily="49" charset="0"/>
+            </a:endParaRPr>
           </a:p>
           <a:p>
             <a:r>
@@ -11012,6 +12774,12 @@
               </a:rPr>
               <a:t>BEGIN</a:t>
             </a:r>
+            <a:endParaRPr lang="en-US" sz="1500" i="1" dirty="0">
+              <a:solidFill>
+                <a:srgbClr val="00FFFF"/>
+              </a:solidFill>
+              <a:latin typeface="Consolas" panose="020B0609020204030204" pitchFamily="49" charset="0"/>
+            </a:endParaRPr>
           </a:p>
           <a:p>
             <a:r>
@@ -11041,6 +12809,12 @@
               </a:rPr>
               <a:t> INT;</a:t>
             </a:r>
+            <a:endParaRPr lang="en-US" sz="1500" i="1" dirty="0">
+              <a:solidFill>
+                <a:srgbClr val="00FFFF"/>
+              </a:solidFill>
+              <a:latin typeface="Consolas" panose="020B0609020204030204" pitchFamily="49" charset="0"/>
+            </a:endParaRPr>
           </a:p>
           <a:p>
             <a:r>
@@ -11088,6 +12862,12 @@
               </a:rPr>
               <a:t>;</a:t>
             </a:r>
+            <a:endParaRPr lang="en-US" sz="1500" i="1" dirty="0">
+              <a:solidFill>
+                <a:srgbClr val="00FFFF"/>
+              </a:solidFill>
+              <a:latin typeface="Consolas" panose="020B0609020204030204" pitchFamily="49" charset="0"/>
+            </a:endParaRPr>
           </a:p>
           <a:p>
             <a:r>
@@ -11117,6 +12897,12 @@
               </a:rPr>
               <a:t>;</a:t>
             </a:r>
+            <a:endParaRPr lang="en-US" sz="1500" i="1" dirty="0">
+              <a:solidFill>
+                <a:srgbClr val="00FFFF"/>
+              </a:solidFill>
+              <a:latin typeface="Consolas" panose="020B0609020204030204" pitchFamily="49" charset="0"/>
+            </a:endParaRPr>
           </a:p>
           <a:p>
             <a:r>
@@ -11128,6 +12914,12 @@
               </a:rPr>
               <a:t>END//</a:t>
             </a:r>
+            <a:endParaRPr lang="en-US" sz="1500" i="1" dirty="0">
+              <a:solidFill>
+                <a:srgbClr val="00FFFF"/>
+              </a:solidFill>
+              <a:latin typeface="Consolas" panose="020B0609020204030204" pitchFamily="49" charset="0"/>
+            </a:endParaRPr>
           </a:p>
           <a:p>
             <a:r>
@@ -11139,8 +12931,6 @@
               </a:rPr>
               <a:t>DELIMITER ;</a:t>
             </a:r>
-          </a:p>
-          <a:p>
             <a:endParaRPr lang="en-US" sz="1500" i="1" dirty="0">
               <a:solidFill>
                 <a:srgbClr val="00FFFF"/>
@@ -11149,6 +12939,14 @@
             </a:endParaRPr>
           </a:p>
           <a:p>
+            <a:endParaRPr lang="en-US" sz="1500" i="1" dirty="0">
+              <a:solidFill>
+                <a:srgbClr val="00FFFF"/>
+              </a:solidFill>
+              <a:latin typeface="Consolas" panose="020B0609020204030204" pitchFamily="49" charset="0"/>
+            </a:endParaRPr>
+          </a:p>
+          <a:p>
             <a:r>
               <a:rPr lang="en-US" sz="1500" i="1" dirty="0">
                 <a:solidFill>
@@ -11185,6 +12983,12 @@
               </a:rPr>
               <a:t>Всего направлений';</a:t>
             </a:r>
+            <a:endParaRPr lang="ru-RU" sz="1500" i="1" dirty="0">
+              <a:solidFill>
+                <a:srgbClr val="00FFFF"/>
+              </a:solidFill>
+              <a:latin typeface="Consolas" panose="020B0609020204030204" pitchFamily="49" charset="0"/>
+            </a:endParaRPr>
           </a:p>
         </p:txBody>
       </p:sp>
@@ -11195,7 +12999,7 @@
           <p:nvPr/>
         </p:nvPicPr>
         <p:blipFill>
-          <a:blip r:embed="rId2"/>
+          <a:blip r:embed="rId1"/>
           <a:stretch>
             <a:fillRect/>
           </a:stretch>
@@ -11240,6 +13044,12 @@
               </a:rPr>
               <a:t>DELIMITER //</a:t>
             </a:r>
+            <a:endParaRPr lang="en-US" sz="1500" i="1" dirty="0">
+              <a:solidFill>
+                <a:srgbClr val="00FFFF"/>
+              </a:solidFill>
+              <a:latin typeface="Consolas" panose="020B0609020204030204" pitchFamily="49" charset="0"/>
+            </a:endParaRPr>
           </a:p>
           <a:p>
             <a:r>
@@ -11269,6 +13079,12 @@
               </a:rPr>
               <a:t>(</a:t>
             </a:r>
+            <a:endParaRPr lang="en-US" sz="1500" i="1" dirty="0">
+              <a:solidFill>
+                <a:srgbClr val="00FFFF"/>
+              </a:solidFill>
+              <a:latin typeface="Consolas" panose="020B0609020204030204" pitchFamily="49" charset="0"/>
+            </a:endParaRPr>
           </a:p>
           <a:p>
             <a:r>
@@ -11298,6 +13114,12 @@
               </a:rPr>
               <a:t> INT,</a:t>
             </a:r>
+            <a:endParaRPr lang="en-US" sz="1500" i="1" dirty="0">
+              <a:solidFill>
+                <a:srgbClr val="00FFFF"/>
+              </a:solidFill>
+              <a:latin typeface="Consolas" panose="020B0609020204030204" pitchFamily="49" charset="0"/>
+            </a:endParaRPr>
           </a:p>
           <a:p>
             <a:r>
@@ -11327,6 +13149,12 @@
               </a:rPr>
               <a:t> INT</a:t>
             </a:r>
+            <a:endParaRPr lang="en-US" sz="1500" i="1" dirty="0">
+              <a:solidFill>
+                <a:srgbClr val="00FFFF"/>
+              </a:solidFill>
+              <a:latin typeface="Consolas" panose="020B0609020204030204" pitchFamily="49" charset="0"/>
+            </a:endParaRPr>
           </a:p>
           <a:p>
             <a:r>
@@ -11338,6 +13166,12 @@
               </a:rPr>
               <a:t>)</a:t>
             </a:r>
+            <a:endParaRPr lang="en-US" sz="1500" i="1" dirty="0">
+              <a:solidFill>
+                <a:srgbClr val="00FFFF"/>
+              </a:solidFill>
+              <a:latin typeface="Consolas" panose="020B0609020204030204" pitchFamily="49" charset="0"/>
+            </a:endParaRPr>
           </a:p>
           <a:p>
             <a:r>
@@ -11349,6 +13183,12 @@
               </a:rPr>
               <a:t>BEGIN</a:t>
             </a:r>
+            <a:endParaRPr lang="en-US" sz="1500" i="1" dirty="0">
+              <a:solidFill>
+                <a:srgbClr val="00FFFF"/>
+              </a:solidFill>
+              <a:latin typeface="Consolas" panose="020B0609020204030204" pitchFamily="49" charset="0"/>
+            </a:endParaRPr>
           </a:p>
           <a:p>
             <a:r>
@@ -11360,6 +13200,12 @@
               </a:rPr>
               <a:t>    UPDATE Student </a:t>
             </a:r>
+            <a:endParaRPr lang="en-US" sz="1500" i="1" dirty="0">
+              <a:solidFill>
+                <a:srgbClr val="00FFFF"/>
+              </a:solidFill>
+              <a:latin typeface="Consolas" panose="020B0609020204030204" pitchFamily="49" charset="0"/>
+            </a:endParaRPr>
           </a:p>
           <a:p>
             <a:r>
@@ -11407,6 +13253,12 @@
               </a:rPr>
               <a:t> </a:t>
             </a:r>
+            <a:endParaRPr lang="en-US" sz="1500" i="1" dirty="0">
+              <a:solidFill>
+                <a:srgbClr val="00FFFF"/>
+              </a:solidFill>
+              <a:latin typeface="Consolas" panose="020B0609020204030204" pitchFamily="49" charset="0"/>
+            </a:endParaRPr>
           </a:p>
           <a:p>
             <a:r>
@@ -11436,6 +13288,12 @@
               </a:rPr>
               <a:t>;</a:t>
             </a:r>
+            <a:endParaRPr lang="en-US" sz="1500" i="1" dirty="0">
+              <a:solidFill>
+                <a:srgbClr val="00FFFF"/>
+              </a:solidFill>
+              <a:latin typeface="Consolas" panose="020B0609020204030204" pitchFamily="49" charset="0"/>
+            </a:endParaRPr>
           </a:p>
           <a:p>
             <a:r>
@@ -11447,6 +13305,12 @@
               </a:rPr>
               <a:t>END //</a:t>
             </a:r>
+            <a:endParaRPr lang="en-US" sz="1500" i="1" dirty="0">
+              <a:solidFill>
+                <a:srgbClr val="00FFFF"/>
+              </a:solidFill>
+              <a:latin typeface="Consolas" panose="020B0609020204030204" pitchFamily="49" charset="0"/>
+            </a:endParaRPr>
           </a:p>
           <a:p>
             <a:r>
@@ -11458,8 +13322,6 @@
               </a:rPr>
               <a:t>DELIMITER ;</a:t>
             </a:r>
-          </a:p>
-          <a:p>
             <a:endParaRPr lang="en-US" sz="1500" i="1" dirty="0">
               <a:solidFill>
                 <a:srgbClr val="00FFFF"/>
@@ -11468,6 +13330,14 @@
             </a:endParaRPr>
           </a:p>
           <a:p>
+            <a:endParaRPr lang="en-US" sz="1500" i="1" dirty="0">
+              <a:solidFill>
+                <a:srgbClr val="00FFFF"/>
+              </a:solidFill>
+              <a:latin typeface="Consolas" panose="020B0609020204030204" pitchFamily="49" charset="0"/>
+            </a:endParaRPr>
+          </a:p>
+          <a:p>
             <a:r>
               <a:rPr lang="en-US" sz="1500" i="1" dirty="0">
                 <a:solidFill>
@@ -11495,6 +13365,12 @@
               </a:rPr>
               <a:t>(1, 5);</a:t>
             </a:r>
+            <a:endParaRPr lang="en-US" sz="1500" i="1" dirty="0">
+              <a:solidFill>
+                <a:srgbClr val="00FFFF"/>
+              </a:solidFill>
+              <a:latin typeface="Consolas" panose="020B0609020204030204" pitchFamily="49" charset="0"/>
+            </a:endParaRPr>
           </a:p>
         </p:txBody>
       </p:sp>
@@ -11505,7 +13381,7 @@
           <p:nvPr/>
         </p:nvPicPr>
         <p:blipFill>
-          <a:blip r:embed="rId3"/>
+          <a:blip r:embed="rId2"/>
           <a:stretch>
             <a:fillRect/>
           </a:stretch>
@@ -11520,12 +13396,52 @@
           </a:prstGeom>
         </p:spPr>
       </p:pic>
+      <p:sp>
+        <p:nvSpPr>
+          <p:cNvPr id="5" name="Текстовое поле 4">
+            <a:hlinkClick r:id="rId3" action="ppaction://hlinksldjump"/>
+          </p:cNvPr>
+          <p:cNvSpPr txBox="1"/>
+          <p:nvPr/>
+        </p:nvSpPr>
+        <p:spPr>
+          <a:xfrm>
+            <a:off x="10215880" y="208280"/>
+            <a:ext cx="1758315" cy="429895"/>
+          </a:xfrm>
+          <a:prstGeom prst="rect">
+            <a:avLst/>
+          </a:prstGeom>
+          <a:noFill/>
+        </p:spPr>
+        <p:txBody>
+          <a:bodyPr wrap="square" rtlCol="0" anchor="t">
+            <a:spAutoFit/>
+          </a:bodyPr>
+          <a:p>
+            <a:r>
+              <a:rPr lang="ru-RU" altLang="en-US" sz="2200" dirty="0" smtClean="0">
+                <a:solidFill>
+                  <a:schemeClr val="bg1"/>
+                </a:solidFill>
+                <a:effectLst/>
+                <a:latin typeface="quote-cjk-patch"/>
+                <a:sym typeface="+mn-ea"/>
+              </a:rPr>
+              <a:t>Оглавление</a:t>
+            </a:r>
+            <a:endParaRPr lang="ru-RU" altLang="en-US" sz="2200" dirty="0" smtClean="0">
+              <a:solidFill>
+                <a:schemeClr val="bg1"/>
+              </a:solidFill>
+              <a:effectLst/>
+              <a:latin typeface="quote-cjk-patch"/>
+              <a:sym typeface="+mn-ea"/>
+            </a:endParaRPr>
+          </a:p>
+        </p:txBody>
+      </p:sp>
     </p:spTree>
-    <p:extLst>
-      <p:ext uri="{BB962C8B-B14F-4D97-AF65-F5344CB8AC3E}">
-        <p14:creationId xmlns:p14="http://schemas.microsoft.com/office/powerpoint/2010/main" val="4236707065"/>
-      </p:ext>
-    </p:extLst>
   </p:cSld>
   <p:clrMapOvr>
     <a:masterClrMapping/>
@@ -11583,7 +13499,7 @@
     </a:clrScheme>
     <a:fontScheme name="Стандартная">
       <a:majorFont>
-        <a:latin typeface="Calibri Light" panose="020F0302020204030204"/>
+        <a:latin typeface="Calibri Light"/>
         <a:ea typeface=""/>
         <a:cs typeface=""/>
         <a:font script="Jpan" typeface="游ゴシック Light"/>
@@ -11618,7 +13534,7 @@
         <a:font script="Geor" typeface="Sylfaen"/>
       </a:majorFont>
       <a:minorFont>
-        <a:latin typeface="Calibri" panose="020F0502020204030204"/>
+        <a:latin typeface="Calibri"/>
         <a:ea typeface=""/>
         <a:cs typeface=""/>
         <a:font script="Jpan" typeface="游ゴシック"/>
@@ -11791,8 +13707,6 @@
       </a:bgFillStyleLst>
     </a:fmtScheme>
   </a:themeElements>
-  <a:objectDefaults/>
-  <a:extraClrSchemeLst/>
   <a:extLst>
     <a:ext uri="{05A4C25C-085E-4340-85A3-A5531E510DB2}">
       <thm15:themeFamily xmlns:thm15="http://schemas.microsoft.com/office/thememl/2012/main" name="Office Theme" id="{62F939B6-93AF-4DB8-9C6B-D6C7DFDC589F}" vid="{4A3C46E8-61CC-4603-A589-7422A47A8E4A}"/>
